--- a/setup-de/Datenanalyse.pptx
+++ b/setup-de/Datenanalyse.pptx
@@ -5,12 +5,13 @@
     <p:sldMasterId id="2147483648" r:id="rId1"/>
   </p:sldMasterIdLst>
   <p:notesMasterIdLst>
-    <p:notesMasterId r:id="rId5"/>
+    <p:notesMasterId r:id="rId6"/>
   </p:notesMasterIdLst>
   <p:sldIdLst>
     <p:sldId id="256" r:id="rId2"/>
-    <p:sldId id="259" r:id="rId3"/>
-    <p:sldId id="260" r:id="rId4"/>
+    <p:sldId id="261" r:id="rId3"/>
+    <p:sldId id="259" r:id="rId4"/>
+    <p:sldId id="260" r:id="rId5"/>
   </p:sldIdLst>
   <p:sldSz cx="12192000" cy="6858000"/>
   <p:notesSz cx="6858000" cy="9144000"/>
@@ -512,137 +513,107 @@
           <a:lstStyle/>
           <a:p>
             <a:r>
-              <a:rPr lang="en-US" b="1" dirty="0"/>
-              <a:t>Question</a:t>
-            </a:r>
-          </a:p>
-          <a:p>
-            <a:r>
-              <a:rPr lang="en-US" dirty="0"/>
-              <a:t>Define the problem</a:t>
-            </a:r>
-          </a:p>
-          <a:p>
-            <a:r>
-              <a:rPr lang="en-US" dirty="0"/>
-              <a:t>Determine the relevant key metrics</a:t>
-            </a:r>
-          </a:p>
-          <a:p>
-            <a:r>
-              <a:rPr lang="en-US" dirty="0"/>
-              <a:t>What drives customer satisfaction?</a:t>
-            </a:r>
-          </a:p>
-          <a:p>
-            <a:r>
-              <a:rPr lang="en-US" b="1" dirty="0"/>
-              <a:t>Data Collection</a:t>
-            </a:r>
-          </a:p>
-          <a:p>
-            <a:r>
-              <a:rPr lang="en-US" dirty="0"/>
-              <a:t>Gathering data from databases, APIs, web scraping</a:t>
-            </a:r>
-          </a:p>
-          <a:p>
-            <a:r>
-              <a:rPr lang="en-US" dirty="0"/>
-              <a:t>Product reviews, delivery times</a:t>
-            </a:r>
-          </a:p>
-          <a:p>
-            <a:r>
-              <a:rPr lang="en-US" dirty="0"/>
-              <a:t>Prices &amp; discounts</a:t>
-            </a:r>
-          </a:p>
-          <a:p>
-            <a:r>
-              <a:rPr lang="en-US" b="1" dirty="0"/>
-              <a:t>Preparation</a:t>
-            </a:r>
-          </a:p>
-          <a:p>
-            <a:r>
-              <a:rPr lang="en-US" dirty="0"/>
-              <a:t>Cleaning missing or incomplete data</a:t>
-            </a:r>
-          </a:p>
-          <a:p>
-            <a:r>
-              <a:rPr lang="en-US" dirty="0"/>
-              <a:t>Transforming and structuring raw data</a:t>
-            </a:r>
-          </a:p>
-          <a:p>
-            <a:r>
-              <a:rPr lang="en-US" dirty="0"/>
-              <a:t>e.g., EUR, USD</a:t>
-            </a:r>
-          </a:p>
-          <a:p>
-            <a:r>
-              <a:rPr lang="en-US" b="1" dirty="0"/>
-              <a:t>Analysis</a:t>
-            </a:r>
-          </a:p>
-          <a:p>
-            <a:r>
-              <a:rPr lang="en-US" dirty="0"/>
-              <a:t>Statistical evaluation</a:t>
-            </a:r>
-          </a:p>
-          <a:p>
-            <a:r>
-              <a:rPr lang="en-US" dirty="0"/>
-              <a:t>Correlations</a:t>
-            </a:r>
-          </a:p>
-          <a:p>
-            <a:r>
-              <a:rPr lang="en-US" dirty="0"/>
-              <a:t>Pattern recognition</a:t>
-            </a:r>
-          </a:p>
-          <a:p>
-            <a:r>
-              <a:rPr lang="en-US" dirty="0"/>
-              <a:t>Applying models to gain insights</a:t>
-            </a:r>
-          </a:p>
-          <a:p>
-            <a:r>
-              <a:rPr lang="en-US" b="1" dirty="0"/>
-              <a:t>Sharing</a:t>
-            </a:r>
-          </a:p>
-          <a:p>
-            <a:r>
-              <a:rPr lang="en-US" dirty="0"/>
-              <a:t>Reports</a:t>
-            </a:r>
-          </a:p>
-          <a:p>
-            <a:r>
-              <a:rPr lang="en-US" dirty="0"/>
-              <a:t>Presentations</a:t>
-            </a:r>
-          </a:p>
-          <a:p>
-            <a:r>
-              <a:rPr lang="en-US" dirty="0"/>
-              <a:t>Data storytelling</a:t>
-            </a:r>
-          </a:p>
-          <a:p>
-            <a:r>
-              <a:rPr lang="en-US" dirty="0"/>
-              <a:t>Provide clear recommendations</a:t>
-            </a:r>
-          </a:p>
-          <a:p>
+              <a:rPr lang="de-DE" dirty="0"/>
+              <a:t>Hallo zusammen.</a:t>
+            </a:r>
+            <a:br>
+              <a:rPr lang="de-DE" dirty="0"/>
+            </a:br>
+            <a:r>
+              <a:rPr lang="de-DE" dirty="0"/>
+              <a:t>Willkommen zum Kurs </a:t>
+            </a:r>
+            <a:r>
+              <a:rPr lang="de-DE" b="1" dirty="0"/>
+              <a:t>Datenanalyse</a:t>
+            </a:r>
+            <a:r>
+              <a:rPr lang="de-DE" dirty="0"/>
+              <a:t>.</a:t>
+            </a:r>
+            <a:br>
+              <a:rPr lang="de-DE" dirty="0"/>
+            </a:br>
+            <a:r>
+              <a:rPr lang="de-DE" dirty="0"/>
+              <a:t>Der Kurs dauert zehn Wochen, also fünf Abschnitte, je zwei Wochen.</a:t>
+            </a:r>
+            <a:br>
+              <a:rPr lang="de-DE" dirty="0"/>
+            </a:br>
+            <a:r>
+              <a:rPr lang="de-DE" dirty="0"/>
+              <a:t>Wir starten mit der </a:t>
+            </a:r>
+            <a:r>
+              <a:rPr lang="de-DE" b="1" dirty="0" err="1"/>
+              <a:t>Foundation</a:t>
+            </a:r>
+            <a:r>
+              <a:rPr lang="de-DE" dirty="0"/>
+              <a:t>, dann lernen wir </a:t>
+            </a:r>
+            <a:r>
+              <a:rPr lang="de-DE" b="1" dirty="0"/>
+              <a:t>Excel</a:t>
+            </a:r>
+            <a:r>
+              <a:rPr lang="de-DE" dirty="0"/>
+              <a:t>, </a:t>
+            </a:r>
+            <a:r>
+              <a:rPr lang="de-DE" b="1" dirty="0"/>
+              <a:t>SQL</a:t>
+            </a:r>
+            <a:r>
+              <a:rPr lang="de-DE" dirty="0"/>
+              <a:t>, </a:t>
+            </a:r>
+            <a:r>
+              <a:rPr lang="de-DE" b="1" dirty="0"/>
+              <a:t>Power BI</a:t>
+            </a:r>
+            <a:r>
+              <a:rPr lang="de-DE" dirty="0"/>
+              <a:t> und </a:t>
+            </a:r>
+            <a:r>
+              <a:rPr lang="de-DE" b="1" dirty="0"/>
+              <a:t>Python</a:t>
+            </a:r>
+            <a:r>
+              <a:rPr lang="de-DE" dirty="0"/>
+              <a:t>.</a:t>
+            </a:r>
+            <a:br>
+              <a:rPr lang="de-DE" dirty="0"/>
+            </a:br>
+            <a:r>
+              <a:rPr lang="de-DE" dirty="0"/>
+              <a:t>Warum? Diese Skills sind sehr wichtig für Jobs im Bereich </a:t>
+            </a:r>
+            <a:r>
+              <a:rPr lang="de-DE" b="1" dirty="0"/>
+              <a:t>Data Analysis</a:t>
+            </a:r>
+            <a:r>
+              <a:rPr lang="de-DE" dirty="0"/>
+              <a:t>.</a:t>
+            </a:r>
+            <a:br>
+              <a:rPr lang="de-DE" dirty="0"/>
+            </a:br>
+            <a:r>
+              <a:rPr lang="de-DE" dirty="0"/>
+              <a:t>Wenn ihr diese Tools und Methoden kennt, könnt ihr Daten analysieren, Berichte machen und bessere Entscheidungen treffen.</a:t>
+            </a:r>
+            <a:br>
+              <a:rPr lang="de-DE" dirty="0"/>
+            </a:br>
+            <a:r>
+              <a:rPr lang="de-DE" dirty="0"/>
+              <a:t>Nach der Weiterbildung habt ihr bessere Chancen auf einen Job im Datenbereich.</a:t>
+            </a:r>
             <a:endParaRPr lang="LID4096" dirty="0"/>
           </a:p>
         </p:txBody>
@@ -664,7 +635,7 @@
           <a:p>
             <a:fld id="{60C2D7CD-EEF3-4145-A484-A9D67FF727B1}" type="slidenum">
               <a:rPr lang="LID4096" smtClean="0"/>
-              <a:t>2</a:t>
+              <a:t>1</a:t>
             </a:fld>
             <a:endParaRPr lang="LID4096"/>
           </a:p>
@@ -673,7 +644,7 @@
     </p:spTree>
     <p:extLst>
       <p:ext uri="{BB962C8B-B14F-4D97-AF65-F5344CB8AC3E}">
-        <p14:creationId xmlns:p14="http://schemas.microsoft.com/office/powerpoint/2010/main" val="886407043"/>
+        <p14:creationId xmlns:p14="http://schemas.microsoft.com/office/powerpoint/2010/main" val="2880122599"/>
       </p:ext>
     </p:extLst>
   </p:cSld>
@@ -728,204 +699,26 @@
           <a:lstStyle/>
           <a:p>
             <a:r>
-              <a:rPr lang="en-US" b="1" dirty="0"/>
-              <a:t>Setup, Data &amp; Data Types</a:t>
-            </a:r>
-            <a:endParaRPr lang="en-US" dirty="0"/>
-          </a:p>
-          <a:p>
-            <a:r>
-              <a:rPr lang="en-US" dirty="0"/>
-              <a:t>Install Python, Notebooks, Libraries</a:t>
-            </a:r>
-          </a:p>
-          <a:p>
-            <a:r>
-              <a:rPr lang="en-US" dirty="0"/>
-              <a:t>Overview of Data Types</a:t>
-            </a:r>
-          </a:p>
-          <a:p>
-            <a:r>
-              <a:rPr lang="en-US" dirty="0"/>
-              <a:t>Data | Information</a:t>
-            </a:r>
-          </a:p>
-          <a:p>
-            <a:r>
-              <a:rPr lang="en-US" b="1" dirty="0"/>
-              <a:t>Define Analysis Goals &amp; KPIs</a:t>
-            </a:r>
-            <a:endParaRPr lang="en-US" dirty="0"/>
-          </a:p>
-          <a:p>
-            <a:r>
-              <a:rPr lang="en-US" dirty="0"/>
-              <a:t>Identify analysis questions &amp; objectives</a:t>
-            </a:r>
-          </a:p>
-          <a:p>
-            <a:r>
-              <a:rPr lang="en-US" dirty="0"/>
-              <a:t>Link KPIs to business decisions</a:t>
-            </a:r>
-          </a:p>
-          <a:p>
-            <a:r>
-              <a:rPr lang="en-US" b="1" dirty="0"/>
-              <a:t>Data Gathering &amp; Quality</a:t>
-            </a:r>
-            <a:endParaRPr lang="en-US" dirty="0"/>
-          </a:p>
-          <a:p>
-            <a:r>
-              <a:rPr lang="en-US" dirty="0"/>
-              <a:t>Collect data: APIs, local files, unstructured data</a:t>
-            </a:r>
-          </a:p>
-          <a:p>
-            <a:r>
-              <a:rPr lang="en-US" dirty="0"/>
-              <a:t>Check completeness, accuracy, consistency</a:t>
-            </a:r>
-          </a:p>
-          <a:p>
-            <a:r>
-              <a:rPr lang="en-US" dirty="0"/>
-              <a:t>Load &amp; inspect datasets</a:t>
-            </a:r>
-          </a:p>
-          <a:p>
-            <a:r>
-              <a:rPr lang="en-US" dirty="0"/>
-              <a:t>Check for missing values, duplicates, formatting</a:t>
-            </a:r>
-          </a:p>
-          <a:p>
-            <a:r>
-              <a:rPr lang="en-US" b="1" dirty="0"/>
-              <a:t>Data Cleaning &amp; Preparation</a:t>
-            </a:r>
-            <a:endParaRPr lang="en-US" dirty="0"/>
-          </a:p>
-          <a:p>
-            <a:r>
-              <a:rPr lang="en-US" dirty="0"/>
-              <a:t>Correct missing / incorrect values</a:t>
-            </a:r>
-          </a:p>
-          <a:p>
-            <a:r>
-              <a:rPr lang="en-US" dirty="0"/>
-              <a:t>Standardize formats</a:t>
-            </a:r>
-          </a:p>
-          <a:p>
-            <a:r>
-              <a:rPr lang="en-US" dirty="0"/>
-              <a:t>Transform variables for analysis</a:t>
-            </a:r>
-          </a:p>
-          <a:p>
-            <a:r>
-              <a:rPr lang="en-US" b="1" dirty="0"/>
-              <a:t>Data Modeling &amp; Aggregation</a:t>
-            </a:r>
-            <a:endParaRPr lang="en-US" dirty="0"/>
-          </a:p>
-          <a:p>
-            <a:r>
-              <a:rPr lang="en-US" dirty="0"/>
-              <a:t>Organize data into tables &amp; relationships</a:t>
-            </a:r>
-          </a:p>
-          <a:p>
-            <a:r>
-              <a:rPr lang="en-US" dirty="0"/>
-              <a:t>Feature engineering &amp; aggregations</a:t>
-            </a:r>
-          </a:p>
-          <a:p>
-            <a:r>
-              <a:rPr lang="en-US" b="1" dirty="0"/>
-              <a:t>Descriptive Statistics &amp; KPIs</a:t>
-            </a:r>
-            <a:endParaRPr lang="en-US" dirty="0"/>
-          </a:p>
-          <a:p>
-            <a:r>
-              <a:rPr lang="en-US" dirty="0"/>
-              <a:t>Mean, Median, Mode, Standard Deviation, Range</a:t>
-            </a:r>
-          </a:p>
-          <a:p>
-            <a:r>
-              <a:rPr lang="en-US" dirty="0"/>
-              <a:t>Correlations &amp; Cross-tabs</a:t>
-            </a:r>
-          </a:p>
-          <a:p>
-            <a:r>
-              <a:rPr lang="en-US" b="1" dirty="0"/>
-              <a:t>Data Visualization</a:t>
-            </a:r>
-            <a:endParaRPr lang="en-US" dirty="0"/>
-          </a:p>
-          <a:p>
-            <a:r>
-              <a:rPr lang="en-US" dirty="0"/>
-              <a:t>Classic charts: Bar chart, Histogram, Boxplot, Line chart, Scatter plot</a:t>
-            </a:r>
-          </a:p>
-          <a:p>
-            <a:r>
-              <a:rPr lang="en-US" dirty="0"/>
-              <a:t>Interactive charts</a:t>
-            </a:r>
-          </a:p>
-          <a:p>
-            <a:r>
-              <a:rPr lang="en-US" b="1" dirty="0"/>
-              <a:t>Analytics Workflow &amp; Integration</a:t>
-            </a:r>
-            <a:endParaRPr lang="en-US" dirty="0"/>
-          </a:p>
-          <a:p>
-            <a:r>
-              <a:rPr lang="en-US" dirty="0"/>
-              <a:t>Structured workflow</a:t>
-            </a:r>
-          </a:p>
-          <a:p>
-            <a:r>
-              <a:rPr lang="en-US" dirty="0"/>
-              <a:t>Mini case studies using all previous steps</a:t>
-            </a:r>
-          </a:p>
-          <a:p>
-            <a:r>
-              <a:rPr lang="en-US" b="1" dirty="0"/>
-              <a:t>Capstone End-to-End Project</a:t>
-            </a:r>
-            <a:endParaRPr lang="en-US" dirty="0"/>
-          </a:p>
-          <a:p>
-            <a:r>
-              <a:rPr lang="en-US" dirty="0"/>
-              <a:t>Complete analysis from question to presentation</a:t>
-            </a:r>
-          </a:p>
-          <a:p>
-            <a:r>
-              <a:rPr lang="en-US" dirty="0"/>
-              <a:t>Apply all learned steps</a:t>
-            </a:r>
-          </a:p>
-          <a:p>
-            <a:r>
-              <a:rPr lang="en-US" dirty="0"/>
-              <a:t>Present &amp; discuss results</a:t>
-            </a:r>
+              <a:rPr lang="de-DE" dirty="0"/>
+              <a:t>Heute konzentrieren wir uns auf die </a:t>
+            </a:r>
+            <a:r>
+              <a:rPr lang="de-DE" b="1" dirty="0"/>
+              <a:t>Grundlagen</a:t>
+            </a:r>
+            <a:r>
+              <a:rPr lang="de-DE" dirty="0"/>
+              <a:t>. Dieser Teil ist für </a:t>
+            </a:r>
+            <a:r>
+              <a:rPr lang="de-DE" b="1" dirty="0"/>
+              <a:t>zwei Wochen</a:t>
+            </a:r>
+            <a:r>
+              <a:rPr lang="de-DE" dirty="0"/>
+              <a:t> geplant.</a:t>
+            </a:r>
+            <a:endParaRPr lang="LID4096" dirty="0"/>
           </a:p>
         </p:txBody>
       </p:sp>
@@ -946,7 +739,4665 @@
           <a:p>
             <a:fld id="{60C2D7CD-EEF3-4145-A484-A9D67FF727B1}" type="slidenum">
               <a:rPr lang="LID4096" smtClean="0"/>
+              <a:t>2</a:t>
+            </a:fld>
+            <a:endParaRPr lang="LID4096"/>
+          </a:p>
+        </p:txBody>
+      </p:sp>
+    </p:spTree>
+    <p:extLst>
+      <p:ext uri="{BB962C8B-B14F-4D97-AF65-F5344CB8AC3E}">
+        <p14:creationId xmlns:p14="http://schemas.microsoft.com/office/powerpoint/2010/main" val="3811429989"/>
+      </p:ext>
+    </p:extLst>
+  </p:cSld>
+  <p:clrMapOvr>
+    <a:masterClrMapping/>
+  </p:clrMapOvr>
+</p:notes>
+</file>
+
+<file path=ppt/notesSlides/notesSlide3.xml><?xml version="1.0" encoding="utf-8"?>
+<p:notes xmlns:a="http://schemas.openxmlformats.org/drawingml/2006/main" xmlns:r="http://schemas.openxmlformats.org/officeDocument/2006/relationships" xmlns:p="http://schemas.openxmlformats.org/presentationml/2006/main">
+  <p:cSld>
+    <p:spTree>
+      <p:nvGrpSpPr>
+        <p:cNvPr id="1" name=""/>
+        <p:cNvGrpSpPr/>
+        <p:nvPr/>
+      </p:nvGrpSpPr>
+      <p:grpSpPr>
+        <a:xfrm>
+          <a:off x="0" y="0"/>
+          <a:ext cx="0" cy="0"/>
+          <a:chOff x="0" y="0"/>
+          <a:chExt cx="0" cy="0"/>
+        </a:xfrm>
+      </p:grpSpPr>
+      <p:sp>
+        <p:nvSpPr>
+          <p:cNvPr id="2" name="Slide Image Placeholder 1"/>
+          <p:cNvSpPr>
+            <a:spLocks noGrp="1" noRot="1" noChangeAspect="1"/>
+          </p:cNvSpPr>
+          <p:nvPr>
+            <p:ph type="sldImg"/>
+          </p:nvPr>
+        </p:nvSpPr>
+        <p:spPr/>
+      </p:sp>
+      <p:sp>
+        <p:nvSpPr>
+          <p:cNvPr id="3" name="Notes Placeholder 2"/>
+          <p:cNvSpPr>
+            <a:spLocks noGrp="1"/>
+          </p:cNvSpPr>
+          <p:nvPr>
+            <p:ph type="body" idx="1"/>
+          </p:nvPr>
+        </p:nvSpPr>
+        <p:spPr/>
+        <p:txBody>
+          <a:bodyPr/>
+          <a:lstStyle/>
+          <a:p>
+            <a:r>
+              <a:rPr lang="de-DE" dirty="0"/>
+              <a:t>Ein Datenanalyse-Prozess beginnt immer mit einer </a:t>
+            </a:r>
+            <a:r>
+              <a:rPr lang="de-DE" b="1" dirty="0"/>
+              <a:t>Fragestellung</a:t>
+            </a:r>
+            <a:r>
+              <a:rPr lang="de-DE" dirty="0"/>
+              <a:t>. Wir müssen zuerst das Problem festlegen. Danach folgt die </a:t>
+            </a:r>
+            <a:r>
+              <a:rPr lang="de-DE" b="1" dirty="0"/>
+              <a:t>Erhebung</a:t>
+            </a:r>
+            <a:r>
+              <a:rPr lang="de-DE" dirty="0"/>
+              <a:t>. Hier sammeln wir die Daten, zum Beispiel aus Datenbanken oder durch Web </a:t>
+            </a:r>
+            <a:r>
+              <a:rPr lang="de-DE" dirty="0" err="1"/>
+              <a:t>Scraping</a:t>
+            </a:r>
+            <a:r>
+              <a:rPr lang="de-DE" dirty="0"/>
+              <a:t>.</a:t>
+            </a:r>
+          </a:p>
+          <a:p>
+            <a:r>
+              <a:rPr lang="de-DE" dirty="0"/>
+              <a:t>Der nächste Schritt ist die </a:t>
+            </a:r>
+            <a:r>
+              <a:rPr lang="de-DE" b="1" dirty="0"/>
+              <a:t>Vorbereitung</a:t>
+            </a:r>
+            <a:r>
+              <a:rPr lang="de-DE" dirty="0"/>
+              <a:t>. Wir bereinigen die Daten und prüfen auf fehlende Werte. Wenn die Daten sauber sind, gehen wir zur </a:t>
+            </a:r>
+            <a:r>
+              <a:rPr lang="de-DE" b="1" dirty="0"/>
+              <a:t>Analyse</a:t>
+            </a:r>
+            <a:r>
+              <a:rPr lang="de-DE" dirty="0"/>
+              <a:t> über. Wir suchen nach Korrelationen und Mustern. Am Ende müssen wir die Ergebnisse </a:t>
+            </a:r>
+            <a:r>
+              <a:rPr lang="de-DE" b="1" dirty="0"/>
+              <a:t>teilen</a:t>
+            </a:r>
+            <a:r>
+              <a:rPr lang="de-DE" dirty="0"/>
+              <a:t>. Wir erstellen Berichte und geben klare Empfehlungen.</a:t>
+            </a:r>
+          </a:p>
+          <a:p>
+            <a:r>
+              <a:rPr lang="de-DE" dirty="0"/>
+              <a:t>Unser Kursplan basiert genau auf diesem Prozess. In den nächsten zwei Wochen lernen wir zuerst, wie man Daten </a:t>
+            </a:r>
+            <a:r>
+              <a:rPr lang="de-DE" b="1" dirty="0"/>
+              <a:t>erhebt</a:t>
+            </a:r>
+            <a:r>
+              <a:rPr lang="de-DE" dirty="0"/>
+              <a:t>. Danach schauen wir uns an, wie man sie </a:t>
+            </a:r>
+            <a:r>
+              <a:rPr lang="de-DE" b="1" dirty="0"/>
+              <a:t>vorbereitet</a:t>
+            </a:r>
+            <a:r>
+              <a:rPr lang="de-DE" dirty="0"/>
+              <a:t>. Dann folgt der wichtigste Teil: die </a:t>
+            </a:r>
+            <a:r>
+              <a:rPr lang="de-DE" b="1" dirty="0"/>
+              <a:t>Analyse</a:t>
+            </a:r>
+            <a:r>
+              <a:rPr lang="de-DE" dirty="0"/>
+              <a:t>. Und am Ende lernen wir, wie man die Ergebnisse richtig </a:t>
+            </a:r>
+            <a:r>
+              <a:rPr lang="de-DE" b="1" dirty="0"/>
+              <a:t>kommuniziert</a:t>
+            </a:r>
+            <a:r>
+              <a:rPr lang="de-DE" dirty="0"/>
+              <a:t>.</a:t>
+            </a:r>
+            <a:endParaRPr lang="en-US" b="1" dirty="0"/>
+          </a:p>
+          <a:p>
+            <a:r>
+              <a:rPr lang="de-DE" dirty="0"/>
+              <a:t>Gute Fragen zu formulieren ist eine Fähigkeit, die wir durch Übung entwickeln. Zuerst müssen wir lernen, welche </a:t>
+            </a:r>
+            <a:r>
+              <a:rPr lang="de-DE" b="1" dirty="0"/>
+              <a:t>Werkzeuge</a:t>
+            </a:r>
+            <a:r>
+              <a:rPr lang="de-DE" dirty="0"/>
+              <a:t> wir haben. Wenn wir die Tools verstehen, können wir das Problem übersetzen und zu einem </a:t>
+            </a:r>
+            <a:r>
+              <a:rPr lang="de-DE" b="1" dirty="0"/>
+              <a:t>Ergebnis</a:t>
+            </a:r>
+            <a:r>
+              <a:rPr lang="de-DE" dirty="0"/>
+              <a:t> kommen.</a:t>
+            </a:r>
+            <a:endParaRPr lang="en-US" b="1" dirty="0"/>
+          </a:p>
+          <a:p>
+            <a:endParaRPr lang="en-US" b="1" dirty="0"/>
+          </a:p>
+          <a:p>
+            <a:r>
+              <a:rPr lang="en-US" b="1" dirty="0"/>
+              <a:t>Question</a:t>
+            </a:r>
+          </a:p>
+          <a:p>
+            <a:r>
+              <a:rPr lang="en-US" dirty="0"/>
+              <a:t>Define the problem</a:t>
+            </a:r>
+          </a:p>
+          <a:p>
+            <a:r>
+              <a:rPr lang="en-US" dirty="0"/>
+              <a:t>Determine the relevant key metrics</a:t>
+            </a:r>
+          </a:p>
+          <a:p>
+            <a:r>
+              <a:rPr lang="en-US" dirty="0"/>
+              <a:t>What drives customer satisfaction?</a:t>
+            </a:r>
+          </a:p>
+          <a:p>
+            <a:r>
+              <a:rPr lang="en-US" b="1" dirty="0"/>
+              <a:t>Data Collection</a:t>
+            </a:r>
+          </a:p>
+          <a:p>
+            <a:r>
+              <a:rPr lang="en-US" dirty="0"/>
+              <a:t>Gathering data from databases, APIs, web scraping</a:t>
+            </a:r>
+          </a:p>
+          <a:p>
+            <a:r>
+              <a:rPr lang="en-US" dirty="0"/>
+              <a:t>Product reviews, delivery times</a:t>
+            </a:r>
+          </a:p>
+          <a:p>
+            <a:r>
+              <a:rPr lang="en-US" dirty="0"/>
+              <a:t>Prices &amp; discounts</a:t>
+            </a:r>
+          </a:p>
+          <a:p>
+            <a:r>
+              <a:rPr lang="en-US" b="1" dirty="0"/>
+              <a:t>Preparation</a:t>
+            </a:r>
+          </a:p>
+          <a:p>
+            <a:r>
+              <a:rPr lang="en-US" dirty="0"/>
+              <a:t>Cleaning missing or incomplete data</a:t>
+            </a:r>
+          </a:p>
+          <a:p>
+            <a:r>
+              <a:rPr lang="en-US" dirty="0"/>
+              <a:t>Transforming and structuring raw data</a:t>
+            </a:r>
+          </a:p>
+          <a:p>
+            <a:r>
+              <a:rPr lang="en-US" dirty="0"/>
+              <a:t>e.g., EUR, USD</a:t>
+            </a:r>
+          </a:p>
+          <a:p>
+            <a:r>
+              <a:rPr lang="en-US" b="1" dirty="0"/>
+              <a:t>Analysis</a:t>
+            </a:r>
+          </a:p>
+          <a:p>
+            <a:r>
+              <a:rPr lang="en-US" dirty="0"/>
+              <a:t>Statistical evaluation</a:t>
+            </a:r>
+          </a:p>
+          <a:p>
+            <a:r>
+              <a:rPr lang="en-US" dirty="0"/>
+              <a:t>Correlations</a:t>
+            </a:r>
+          </a:p>
+          <a:p>
+            <a:r>
+              <a:rPr lang="en-US" dirty="0"/>
+              <a:t>Pattern recognition</a:t>
+            </a:r>
+          </a:p>
+          <a:p>
+            <a:r>
+              <a:rPr lang="en-US" dirty="0"/>
+              <a:t>Applying models to gain insights</a:t>
+            </a:r>
+          </a:p>
+          <a:p>
+            <a:r>
+              <a:rPr lang="en-US" b="1" dirty="0"/>
+              <a:t>Sharing</a:t>
+            </a:r>
+          </a:p>
+          <a:p>
+            <a:r>
+              <a:rPr lang="en-US" dirty="0"/>
+              <a:t>Reports</a:t>
+            </a:r>
+          </a:p>
+          <a:p>
+            <a:r>
+              <a:rPr lang="en-US" dirty="0"/>
+              <a:t>Presentations</a:t>
+            </a:r>
+          </a:p>
+          <a:p>
+            <a:r>
+              <a:rPr lang="en-US" dirty="0"/>
+              <a:t>Data storytelling</a:t>
+            </a:r>
+          </a:p>
+          <a:p>
+            <a:r>
+              <a:rPr lang="en-US" dirty="0"/>
+              <a:t>Provide clear recommendations</a:t>
+            </a:r>
+          </a:p>
+          <a:p>
+            <a:endParaRPr lang="LID4096" dirty="0"/>
+          </a:p>
+        </p:txBody>
+      </p:sp>
+      <p:sp>
+        <p:nvSpPr>
+          <p:cNvPr id="4" name="Slide Number Placeholder 3"/>
+          <p:cNvSpPr>
+            <a:spLocks noGrp="1"/>
+          </p:cNvSpPr>
+          <p:nvPr>
+            <p:ph type="sldNum" sz="quarter" idx="5"/>
+          </p:nvPr>
+        </p:nvSpPr>
+        <p:spPr/>
+        <p:txBody>
+          <a:bodyPr/>
+          <a:lstStyle/>
+          <a:p>
+            <a:fld id="{60C2D7CD-EEF3-4145-A484-A9D67FF727B1}" type="slidenum">
+              <a:rPr lang="LID4096" smtClean="0"/>
               <a:t>3</a:t>
+            </a:fld>
+            <a:endParaRPr lang="LID4096"/>
+          </a:p>
+        </p:txBody>
+      </p:sp>
+    </p:spTree>
+    <p:extLst>
+      <p:ext uri="{BB962C8B-B14F-4D97-AF65-F5344CB8AC3E}">
+        <p14:creationId xmlns:p14="http://schemas.microsoft.com/office/powerpoint/2010/main" val="886407043"/>
+      </p:ext>
+    </p:extLst>
+  </p:cSld>
+  <p:clrMapOvr>
+    <a:masterClrMapping/>
+  </p:clrMapOvr>
+</p:notes>
+</file>
+
+<file path=ppt/notesSlides/notesSlide4.xml><?xml version="1.0" encoding="utf-8"?>
+<p:notes xmlns:a="http://schemas.openxmlformats.org/drawingml/2006/main" xmlns:r="http://schemas.openxmlformats.org/officeDocument/2006/relationships" xmlns:p="http://schemas.openxmlformats.org/presentationml/2006/main">
+  <p:cSld>
+    <p:spTree>
+      <p:nvGrpSpPr>
+        <p:cNvPr id="1" name=""/>
+        <p:cNvGrpSpPr/>
+        <p:nvPr/>
+      </p:nvGrpSpPr>
+      <p:grpSpPr>
+        <a:xfrm>
+          <a:off x="0" y="0"/>
+          <a:ext cx="0" cy="0"/>
+          <a:chOff x="0" y="0"/>
+          <a:chExt cx="0" cy="0"/>
+        </a:xfrm>
+      </p:grpSpPr>
+      <p:sp>
+        <p:nvSpPr>
+          <p:cNvPr id="2" name="Slide Image Placeholder 1"/>
+          <p:cNvSpPr>
+            <a:spLocks noGrp="1" noRot="1" noChangeAspect="1"/>
+          </p:cNvSpPr>
+          <p:nvPr>
+            <p:ph type="sldImg"/>
+          </p:nvPr>
+        </p:nvSpPr>
+        <p:spPr/>
+      </p:sp>
+      <p:sp>
+        <p:nvSpPr>
+          <p:cNvPr id="3" name="Notes Placeholder 2"/>
+          <p:cNvSpPr>
+            <a:spLocks noGrp="1"/>
+          </p:cNvSpPr>
+          <p:nvPr>
+            <p:ph type="body" idx="1"/>
+          </p:nvPr>
+        </p:nvSpPr>
+        <p:spPr/>
+        <p:txBody>
+          <a:bodyPr/>
+          <a:lstStyle/>
+          <a:p>
+            <a:r>
+              <a:rPr lang="en-US" sz="1200" b="1" i="0" kern="1200" dirty="0">
+                <a:solidFill>
+                  <a:schemeClr val="tx1"/>
+                </a:solidFill>
+                <a:effectLst/>
+                <a:latin typeface="+mn-lt"/>
+                <a:ea typeface="+mn-ea"/>
+                <a:cs typeface="+mn-cs"/>
+              </a:rPr>
+              <a:t>Gemini said</a:t>
+            </a:r>
+          </a:p>
+          <a:p>
+            <a:pPr rtl="0"/>
+            <a:r>
+              <a:rPr lang="en-US" sz="1200" b="0" i="0" kern="1200" dirty="0">
+                <a:solidFill>
+                  <a:schemeClr val="tx1"/>
+                </a:solidFill>
+                <a:effectLst/>
+                <a:latin typeface="+mn-lt"/>
+                <a:ea typeface="+mn-ea"/>
+                <a:cs typeface="+mn-cs"/>
+              </a:rPr>
+              <a:t>To explain these 9 topics, you can use the script below. It connects your technical tools (Python, </a:t>
+            </a:r>
+            <a:r>
+              <a:rPr lang="en-US" sz="1200" b="0" i="0" kern="1200" dirty="0" err="1">
+                <a:solidFill>
+                  <a:schemeClr val="tx1"/>
+                </a:solidFill>
+                <a:effectLst/>
+                <a:latin typeface="+mn-lt"/>
+                <a:ea typeface="+mn-ea"/>
+                <a:cs typeface="+mn-cs"/>
+              </a:rPr>
+              <a:t>Jupyter</a:t>
+            </a:r>
+            <a:r>
+              <a:rPr lang="en-US" sz="1200" b="0" i="0" kern="1200" dirty="0">
+                <a:solidFill>
+                  <a:schemeClr val="tx1"/>
+                </a:solidFill>
+                <a:effectLst/>
+                <a:latin typeface="+mn-lt"/>
+                <a:ea typeface="+mn-ea"/>
+                <a:cs typeface="+mn-cs"/>
+              </a:rPr>
+              <a:t>) to the ultimate goal of reaching a conclusion.</a:t>
+            </a:r>
+          </a:p>
+          <a:p>
+            <a:pPr rtl="0"/>
+            <a:br>
+              <a:rPr lang="en-US" sz="1200" b="0" i="0" kern="1200" dirty="0">
+                <a:solidFill>
+                  <a:schemeClr val="tx1"/>
+                </a:solidFill>
+                <a:effectLst/>
+                <a:latin typeface="+mn-lt"/>
+                <a:ea typeface="+mn-ea"/>
+                <a:cs typeface="+mn-cs"/>
+              </a:rPr>
+            </a:br>
+            <a:endParaRPr lang="en-US" sz="1200" b="0" i="0" kern="1200" dirty="0">
+              <a:solidFill>
+                <a:schemeClr val="tx1"/>
+              </a:solidFill>
+              <a:effectLst/>
+              <a:latin typeface="+mn-lt"/>
+              <a:ea typeface="+mn-ea"/>
+              <a:cs typeface="+mn-cs"/>
+            </a:endParaRPr>
+          </a:p>
+          <a:p>
+            <a:pPr rtl="0"/>
+            <a:r>
+              <a:rPr lang="en-US" sz="1200" b="1" i="0" kern="1200" dirty="0">
+                <a:solidFill>
+                  <a:schemeClr val="tx1"/>
+                </a:solidFill>
+                <a:effectLst/>
+                <a:latin typeface="+mn-lt"/>
+                <a:ea typeface="+mn-ea"/>
+                <a:cs typeface="+mn-cs"/>
+              </a:rPr>
+              <a:t>Slides 3 &amp; 4: </a:t>
+            </a:r>
+            <a:r>
+              <a:rPr lang="en-US" sz="1200" b="1" i="0" kern="1200" dirty="0" err="1">
+                <a:solidFill>
+                  <a:schemeClr val="tx1"/>
+                </a:solidFill>
+                <a:effectLst/>
+                <a:latin typeface="+mn-lt"/>
+                <a:ea typeface="+mn-ea"/>
+                <a:cs typeface="+mn-cs"/>
+              </a:rPr>
+              <a:t>Unsere</a:t>
+            </a:r>
+            <a:r>
+              <a:rPr lang="en-US" sz="1200" b="1" i="0" kern="1200" dirty="0">
+                <a:solidFill>
+                  <a:schemeClr val="tx1"/>
+                </a:solidFill>
+                <a:effectLst/>
+                <a:latin typeface="+mn-lt"/>
+                <a:ea typeface="+mn-ea"/>
+                <a:cs typeface="+mn-cs"/>
+              </a:rPr>
+              <a:t> 9 </a:t>
+            </a:r>
+            <a:r>
+              <a:rPr lang="en-US" sz="1200" b="1" i="0" kern="1200" dirty="0" err="1">
+                <a:solidFill>
+                  <a:schemeClr val="tx1"/>
+                </a:solidFill>
+                <a:effectLst/>
+                <a:latin typeface="+mn-lt"/>
+                <a:ea typeface="+mn-ea"/>
+                <a:cs typeface="+mn-cs"/>
+              </a:rPr>
+              <a:t>Themen</a:t>
+            </a:r>
+            <a:r>
+              <a:rPr lang="en-US" sz="1200" b="1" i="0" kern="1200" dirty="0">
+                <a:solidFill>
+                  <a:schemeClr val="tx1"/>
+                </a:solidFill>
+                <a:effectLst/>
+                <a:latin typeface="+mn-lt"/>
+                <a:ea typeface="+mn-ea"/>
+                <a:cs typeface="+mn-cs"/>
+              </a:rPr>
+              <a:t> (Our 9 Topics)</a:t>
+            </a:r>
+          </a:p>
+          <a:p>
+            <a:pPr rtl="0"/>
+            <a:r>
+              <a:rPr lang="en-US" sz="1200" b="1" i="0" kern="1200" dirty="0">
+                <a:solidFill>
+                  <a:schemeClr val="tx1"/>
+                </a:solidFill>
+                <a:effectLst/>
+                <a:latin typeface="+mn-lt"/>
+                <a:ea typeface="+mn-ea"/>
+                <a:cs typeface="+mn-cs"/>
+              </a:rPr>
+              <a:t>General Introduction:</a:t>
+            </a:r>
+            <a:r>
+              <a:rPr lang="en-US" sz="1200" b="0" i="0" kern="1200" dirty="0">
+                <a:solidFill>
+                  <a:schemeClr val="tx1"/>
+                </a:solidFill>
+                <a:effectLst/>
+                <a:latin typeface="+mn-lt"/>
+                <a:ea typeface="+mn-ea"/>
+                <a:cs typeface="+mn-cs"/>
+              </a:rPr>
+              <a:t> "Hier </a:t>
+            </a:r>
+            <a:r>
+              <a:rPr lang="en-US" sz="1200" b="0" i="0" kern="1200" dirty="0" err="1">
+                <a:solidFill>
+                  <a:schemeClr val="tx1"/>
+                </a:solidFill>
+                <a:effectLst/>
+                <a:latin typeface="+mn-lt"/>
+                <a:ea typeface="+mn-ea"/>
+                <a:cs typeface="+mn-cs"/>
+              </a:rPr>
+              <a:t>sehen</a:t>
+            </a:r>
+            <a:r>
+              <a:rPr lang="en-US" sz="1200" b="0" i="0" kern="1200" dirty="0">
+                <a:solidFill>
+                  <a:schemeClr val="tx1"/>
+                </a:solidFill>
+                <a:effectLst/>
+                <a:latin typeface="+mn-lt"/>
+                <a:ea typeface="+mn-ea"/>
+                <a:cs typeface="+mn-cs"/>
+              </a:rPr>
+              <a:t> Sie </a:t>
+            </a:r>
+            <a:r>
+              <a:rPr lang="en-US" sz="1200" b="0" i="0" kern="1200" dirty="0" err="1">
+                <a:solidFill>
+                  <a:schemeClr val="tx1"/>
+                </a:solidFill>
+                <a:effectLst/>
+                <a:latin typeface="+mn-lt"/>
+                <a:ea typeface="+mn-ea"/>
+                <a:cs typeface="+mn-cs"/>
+              </a:rPr>
+              <a:t>unsere</a:t>
+            </a:r>
+            <a:r>
+              <a:rPr lang="en-US" sz="1200" b="0" i="0" kern="1200" dirty="0">
+                <a:solidFill>
+                  <a:schemeClr val="tx1"/>
+                </a:solidFill>
+                <a:effectLst/>
+                <a:latin typeface="+mn-lt"/>
+                <a:ea typeface="+mn-ea"/>
+                <a:cs typeface="+mn-cs"/>
+              </a:rPr>
+              <a:t> </a:t>
+            </a:r>
+            <a:r>
+              <a:rPr lang="en-US" sz="1200" b="0" i="0" kern="1200" dirty="0" err="1">
+                <a:solidFill>
+                  <a:schemeClr val="tx1"/>
+                </a:solidFill>
+                <a:effectLst/>
+                <a:latin typeface="+mn-lt"/>
+                <a:ea typeface="+mn-ea"/>
+                <a:cs typeface="+mn-cs"/>
+              </a:rPr>
+              <a:t>neun</a:t>
+            </a:r>
+            <a:r>
+              <a:rPr lang="en-US" sz="1200" b="0" i="0" kern="1200" dirty="0">
+                <a:solidFill>
+                  <a:schemeClr val="tx1"/>
+                </a:solidFill>
+                <a:effectLst/>
+                <a:latin typeface="+mn-lt"/>
+                <a:ea typeface="+mn-ea"/>
+                <a:cs typeface="+mn-cs"/>
+              </a:rPr>
+              <a:t> </a:t>
+            </a:r>
+            <a:r>
+              <a:rPr lang="en-US" sz="1200" b="0" i="0" kern="1200" dirty="0" err="1">
+                <a:solidFill>
+                  <a:schemeClr val="tx1"/>
+                </a:solidFill>
+                <a:effectLst/>
+                <a:latin typeface="+mn-lt"/>
+                <a:ea typeface="+mn-ea"/>
+                <a:cs typeface="+mn-cs"/>
+              </a:rPr>
+              <a:t>Themengebiete</a:t>
+            </a:r>
+            <a:r>
+              <a:rPr lang="en-US" sz="1200" b="0" i="0" kern="1200" dirty="0">
+                <a:solidFill>
+                  <a:schemeClr val="tx1"/>
+                </a:solidFill>
+                <a:effectLst/>
+                <a:latin typeface="+mn-lt"/>
+                <a:ea typeface="+mn-ea"/>
+                <a:cs typeface="+mn-cs"/>
+              </a:rPr>
+              <a:t>. Wir </a:t>
+            </a:r>
+            <a:r>
+              <a:rPr lang="en-US" sz="1200" b="0" i="0" kern="1200" dirty="0" err="1">
+                <a:solidFill>
+                  <a:schemeClr val="tx1"/>
+                </a:solidFill>
+                <a:effectLst/>
+                <a:latin typeface="+mn-lt"/>
+                <a:ea typeface="+mn-ea"/>
+                <a:cs typeface="+mn-cs"/>
+              </a:rPr>
+              <a:t>beginnen</a:t>
+            </a:r>
+            <a:r>
+              <a:rPr lang="en-US" sz="1200" b="0" i="0" kern="1200" dirty="0">
+                <a:solidFill>
+                  <a:schemeClr val="tx1"/>
+                </a:solidFill>
+                <a:effectLst/>
+                <a:latin typeface="+mn-lt"/>
+                <a:ea typeface="+mn-ea"/>
+                <a:cs typeface="+mn-cs"/>
+              </a:rPr>
+              <a:t> </a:t>
+            </a:r>
+            <a:r>
+              <a:rPr lang="en-US" sz="1200" b="0" i="0" kern="1200" dirty="0" err="1">
+                <a:solidFill>
+                  <a:schemeClr val="tx1"/>
+                </a:solidFill>
+                <a:effectLst/>
+                <a:latin typeface="+mn-lt"/>
+                <a:ea typeface="+mn-ea"/>
+                <a:cs typeface="+mn-cs"/>
+              </a:rPr>
+              <a:t>mit</a:t>
+            </a:r>
+            <a:r>
+              <a:rPr lang="en-US" sz="1200" b="0" i="0" kern="1200" dirty="0">
+                <a:solidFill>
+                  <a:schemeClr val="tx1"/>
+                </a:solidFill>
+                <a:effectLst/>
+                <a:latin typeface="+mn-lt"/>
+                <a:ea typeface="+mn-ea"/>
+                <a:cs typeface="+mn-cs"/>
+              </a:rPr>
+              <a:t> der Technik und </a:t>
+            </a:r>
+            <a:r>
+              <a:rPr lang="en-US" sz="1200" b="0" i="0" kern="1200" dirty="0" err="1">
+                <a:solidFill>
+                  <a:schemeClr val="tx1"/>
+                </a:solidFill>
+                <a:effectLst/>
+                <a:latin typeface="+mn-lt"/>
+                <a:ea typeface="+mn-ea"/>
+                <a:cs typeface="+mn-cs"/>
+              </a:rPr>
+              <a:t>enden</a:t>
+            </a:r>
+            <a:r>
+              <a:rPr lang="en-US" sz="1200" b="0" i="0" kern="1200" dirty="0">
+                <a:solidFill>
+                  <a:schemeClr val="tx1"/>
+                </a:solidFill>
+                <a:effectLst/>
+                <a:latin typeface="+mn-lt"/>
+                <a:ea typeface="+mn-ea"/>
+                <a:cs typeface="+mn-cs"/>
+              </a:rPr>
+              <a:t> </a:t>
+            </a:r>
+            <a:r>
+              <a:rPr lang="en-US" sz="1200" b="0" i="0" kern="1200" dirty="0" err="1">
+                <a:solidFill>
+                  <a:schemeClr val="tx1"/>
+                </a:solidFill>
+                <a:effectLst/>
+                <a:latin typeface="+mn-lt"/>
+                <a:ea typeface="+mn-ea"/>
+                <a:cs typeface="+mn-cs"/>
+              </a:rPr>
+              <a:t>mit</a:t>
+            </a:r>
+            <a:r>
+              <a:rPr lang="en-US" sz="1200" b="0" i="0" kern="1200" dirty="0">
+                <a:solidFill>
+                  <a:schemeClr val="tx1"/>
+                </a:solidFill>
+                <a:effectLst/>
+                <a:latin typeface="+mn-lt"/>
+                <a:ea typeface="+mn-ea"/>
+                <a:cs typeface="+mn-cs"/>
+              </a:rPr>
+              <a:t> </a:t>
+            </a:r>
+            <a:r>
+              <a:rPr lang="en-US" sz="1200" b="0" i="0" kern="1200" dirty="0" err="1">
+                <a:solidFill>
+                  <a:schemeClr val="tx1"/>
+                </a:solidFill>
+                <a:effectLst/>
+                <a:latin typeface="+mn-lt"/>
+                <a:ea typeface="+mn-ea"/>
+                <a:cs typeface="+mn-cs"/>
+              </a:rPr>
+              <a:t>einem</a:t>
+            </a:r>
+            <a:r>
+              <a:rPr lang="en-US" sz="1200" b="0" i="0" kern="1200" dirty="0">
+                <a:solidFill>
+                  <a:schemeClr val="tx1"/>
+                </a:solidFill>
+                <a:effectLst/>
+                <a:latin typeface="+mn-lt"/>
+                <a:ea typeface="+mn-ea"/>
+                <a:cs typeface="+mn-cs"/>
+              </a:rPr>
+              <a:t> </a:t>
+            </a:r>
+            <a:r>
+              <a:rPr lang="en-US" sz="1200" b="0" i="0" kern="1200" dirty="0" err="1">
+                <a:solidFill>
+                  <a:schemeClr val="tx1"/>
+                </a:solidFill>
+                <a:effectLst/>
+                <a:latin typeface="+mn-lt"/>
+                <a:ea typeface="+mn-ea"/>
+                <a:cs typeface="+mn-cs"/>
+              </a:rPr>
+              <a:t>echten</a:t>
+            </a:r>
+            <a:r>
+              <a:rPr lang="en-US" sz="1200" b="0" i="0" kern="1200" dirty="0">
+                <a:solidFill>
+                  <a:schemeClr val="tx1"/>
+                </a:solidFill>
+                <a:effectLst/>
+                <a:latin typeface="+mn-lt"/>
+                <a:ea typeface="+mn-ea"/>
+                <a:cs typeface="+mn-cs"/>
+              </a:rPr>
+              <a:t> Projekt." </a:t>
+            </a:r>
+            <a:r>
+              <a:rPr lang="en-US" sz="1200" b="0" i="1" kern="1200" dirty="0">
+                <a:solidFill>
+                  <a:schemeClr val="tx1"/>
+                </a:solidFill>
+                <a:effectLst/>
+                <a:latin typeface="+mn-lt"/>
+                <a:ea typeface="+mn-ea"/>
+                <a:cs typeface="+mn-cs"/>
+              </a:rPr>
+              <a:t>(Here you see our nine topic areas. We start with the technology and end with a real project.)</a:t>
+            </a:r>
+            <a:endParaRPr lang="en-US" sz="1200" b="0" i="0" kern="1200" dirty="0">
+              <a:solidFill>
+                <a:schemeClr val="tx1"/>
+              </a:solidFill>
+              <a:effectLst/>
+              <a:latin typeface="+mn-lt"/>
+              <a:ea typeface="+mn-ea"/>
+              <a:cs typeface="+mn-cs"/>
+            </a:endParaRPr>
+          </a:p>
+          <a:p>
+            <a:pPr rtl="0"/>
+            <a:br>
+              <a:rPr lang="en-US" sz="1200" b="0" i="0" kern="1200" dirty="0">
+                <a:solidFill>
+                  <a:schemeClr val="tx1"/>
+                </a:solidFill>
+                <a:effectLst/>
+                <a:latin typeface="+mn-lt"/>
+                <a:ea typeface="+mn-ea"/>
+                <a:cs typeface="+mn-cs"/>
+              </a:rPr>
+            </a:br>
+            <a:endParaRPr lang="en-US" sz="1200" b="0" i="0" kern="1200" dirty="0">
+              <a:solidFill>
+                <a:schemeClr val="tx1"/>
+              </a:solidFill>
+              <a:effectLst/>
+              <a:latin typeface="+mn-lt"/>
+              <a:ea typeface="+mn-ea"/>
+              <a:cs typeface="+mn-cs"/>
+            </a:endParaRPr>
+          </a:p>
+          <a:p>
+            <a:pPr rtl="0"/>
+            <a:r>
+              <a:rPr lang="en-US" sz="1200" b="1" i="0" kern="1200" dirty="0">
+                <a:solidFill>
+                  <a:schemeClr val="tx1"/>
+                </a:solidFill>
+                <a:effectLst/>
+                <a:latin typeface="+mn-lt"/>
+                <a:ea typeface="+mn-ea"/>
+                <a:cs typeface="+mn-cs"/>
+              </a:rPr>
+              <a:t>1. Setup, Daten &amp; </a:t>
+            </a:r>
+            <a:r>
+              <a:rPr lang="en-US" sz="1200" b="1" i="0" kern="1200" dirty="0" err="1">
+                <a:solidFill>
+                  <a:schemeClr val="tx1"/>
+                </a:solidFill>
+                <a:effectLst/>
+                <a:latin typeface="+mn-lt"/>
+                <a:ea typeface="+mn-ea"/>
+                <a:cs typeface="+mn-cs"/>
+              </a:rPr>
+              <a:t>Datentypen</a:t>
+            </a:r>
+            <a:endParaRPr lang="en-US" sz="1200" b="1" i="0" kern="1200" dirty="0">
+              <a:solidFill>
+                <a:schemeClr val="tx1"/>
+              </a:solidFill>
+              <a:effectLst/>
+              <a:latin typeface="+mn-lt"/>
+              <a:ea typeface="+mn-ea"/>
+              <a:cs typeface="+mn-cs"/>
+            </a:endParaRPr>
+          </a:p>
+          <a:p>
+            <a:pPr rtl="0"/>
+            <a:r>
+              <a:rPr lang="en-US" sz="1200" b="0" i="0" kern="1200" dirty="0">
+                <a:solidFill>
+                  <a:schemeClr val="tx1"/>
+                </a:solidFill>
+                <a:effectLst/>
+                <a:latin typeface="+mn-lt"/>
+                <a:ea typeface="+mn-ea"/>
+                <a:cs typeface="+mn-cs"/>
+              </a:rPr>
+              <a:t>"</a:t>
+            </a:r>
+            <a:r>
+              <a:rPr lang="en-US" sz="1200" b="0" i="0" kern="1200" dirty="0" err="1">
+                <a:solidFill>
+                  <a:schemeClr val="tx1"/>
+                </a:solidFill>
+                <a:effectLst/>
+                <a:latin typeface="+mn-lt"/>
+                <a:ea typeface="+mn-ea"/>
+                <a:cs typeface="+mn-cs"/>
+              </a:rPr>
+              <a:t>Zuerst</a:t>
+            </a:r>
+            <a:r>
+              <a:rPr lang="en-US" sz="1200" b="0" i="0" kern="1200" dirty="0">
+                <a:solidFill>
+                  <a:schemeClr val="tx1"/>
+                </a:solidFill>
+                <a:effectLst/>
+                <a:latin typeface="+mn-lt"/>
+                <a:ea typeface="+mn-ea"/>
+                <a:cs typeface="+mn-cs"/>
+              </a:rPr>
+              <a:t> </a:t>
+            </a:r>
+            <a:r>
+              <a:rPr lang="en-US" sz="1200" b="0" i="0" kern="1200" dirty="0" err="1">
+                <a:solidFill>
+                  <a:schemeClr val="tx1"/>
+                </a:solidFill>
+                <a:effectLst/>
+                <a:latin typeface="+mn-lt"/>
+                <a:ea typeface="+mn-ea"/>
+                <a:cs typeface="+mn-cs"/>
+              </a:rPr>
+              <a:t>installieren</a:t>
+            </a:r>
+            <a:r>
+              <a:rPr lang="en-US" sz="1200" b="0" i="0" kern="1200" dirty="0">
+                <a:solidFill>
+                  <a:schemeClr val="tx1"/>
+                </a:solidFill>
+                <a:effectLst/>
+                <a:latin typeface="+mn-lt"/>
+                <a:ea typeface="+mn-ea"/>
+                <a:cs typeface="+mn-cs"/>
+              </a:rPr>
+              <a:t> </a:t>
+            </a:r>
+            <a:r>
+              <a:rPr lang="en-US" sz="1200" b="0" i="0" kern="1200" dirty="0" err="1">
+                <a:solidFill>
+                  <a:schemeClr val="tx1"/>
+                </a:solidFill>
+                <a:effectLst/>
+                <a:latin typeface="+mn-lt"/>
+                <a:ea typeface="+mn-ea"/>
+                <a:cs typeface="+mn-cs"/>
+              </a:rPr>
+              <a:t>wir</a:t>
+            </a:r>
+            <a:r>
+              <a:rPr lang="en-US" sz="1200" b="0" i="0" kern="1200" dirty="0">
+                <a:solidFill>
+                  <a:schemeClr val="tx1"/>
+                </a:solidFill>
+                <a:effectLst/>
+                <a:latin typeface="+mn-lt"/>
+                <a:ea typeface="+mn-ea"/>
+                <a:cs typeface="+mn-cs"/>
+              </a:rPr>
+              <a:t> </a:t>
+            </a:r>
+            <a:r>
+              <a:rPr lang="en-US" sz="1200" b="0" i="0" kern="1200" dirty="0" err="1">
+                <a:solidFill>
+                  <a:schemeClr val="tx1"/>
+                </a:solidFill>
+                <a:effectLst/>
+                <a:latin typeface="+mn-lt"/>
+                <a:ea typeface="+mn-ea"/>
+                <a:cs typeface="+mn-cs"/>
+              </a:rPr>
+              <a:t>unsere</a:t>
+            </a:r>
+            <a:r>
+              <a:rPr lang="en-US" sz="1200" b="0" i="0" kern="1200" dirty="0">
+                <a:solidFill>
+                  <a:schemeClr val="tx1"/>
+                </a:solidFill>
+                <a:effectLst/>
+                <a:latin typeface="+mn-lt"/>
+                <a:ea typeface="+mn-ea"/>
+                <a:cs typeface="+mn-cs"/>
+              </a:rPr>
+              <a:t> </a:t>
+            </a:r>
+            <a:r>
+              <a:rPr lang="en-US" sz="1200" b="0" i="0" kern="1200" dirty="0" err="1">
+                <a:solidFill>
+                  <a:schemeClr val="tx1"/>
+                </a:solidFill>
+                <a:effectLst/>
+                <a:latin typeface="+mn-lt"/>
+                <a:ea typeface="+mn-ea"/>
+                <a:cs typeface="+mn-cs"/>
+              </a:rPr>
+              <a:t>Werkzeuge</a:t>
+            </a:r>
+            <a:r>
+              <a:rPr lang="en-US" sz="1200" b="0" i="0" kern="1200" dirty="0">
+                <a:solidFill>
+                  <a:schemeClr val="tx1"/>
+                </a:solidFill>
+                <a:effectLst/>
+                <a:latin typeface="+mn-lt"/>
+                <a:ea typeface="+mn-ea"/>
+                <a:cs typeface="+mn-cs"/>
+              </a:rPr>
+              <a:t>: </a:t>
+            </a:r>
+            <a:r>
+              <a:rPr lang="en-US" sz="1200" b="1" i="0" kern="1200" dirty="0">
+                <a:solidFill>
+                  <a:schemeClr val="tx1"/>
+                </a:solidFill>
+                <a:effectLst/>
+                <a:latin typeface="+mn-lt"/>
+                <a:ea typeface="+mn-ea"/>
+                <a:cs typeface="+mn-cs"/>
+              </a:rPr>
+              <a:t>Python</a:t>
+            </a:r>
+            <a:r>
+              <a:rPr lang="en-US" sz="1200" b="0" i="0" kern="1200" dirty="0">
+                <a:solidFill>
+                  <a:schemeClr val="tx1"/>
+                </a:solidFill>
+                <a:effectLst/>
+                <a:latin typeface="+mn-lt"/>
+                <a:ea typeface="+mn-ea"/>
+                <a:cs typeface="+mn-cs"/>
+              </a:rPr>
+              <a:t>, </a:t>
+            </a:r>
+            <a:r>
+              <a:rPr lang="en-US" sz="1200" b="1" i="0" kern="1200" dirty="0" err="1">
+                <a:solidFill>
+                  <a:schemeClr val="tx1"/>
+                </a:solidFill>
+                <a:effectLst/>
+                <a:latin typeface="+mn-lt"/>
+                <a:ea typeface="+mn-ea"/>
+                <a:cs typeface="+mn-cs"/>
+              </a:rPr>
+              <a:t>VSCode</a:t>
+            </a:r>
+            <a:r>
+              <a:rPr lang="en-US" sz="1200" b="0" i="0" kern="1200" dirty="0">
+                <a:solidFill>
+                  <a:schemeClr val="tx1"/>
+                </a:solidFill>
+                <a:effectLst/>
+                <a:latin typeface="+mn-lt"/>
+                <a:ea typeface="+mn-ea"/>
+                <a:cs typeface="+mn-cs"/>
+              </a:rPr>
+              <a:t> und </a:t>
+            </a:r>
+            <a:r>
+              <a:rPr lang="en-US" sz="1200" b="1" i="0" kern="1200" dirty="0" err="1">
+                <a:solidFill>
+                  <a:schemeClr val="tx1"/>
+                </a:solidFill>
+                <a:effectLst/>
+                <a:latin typeface="+mn-lt"/>
+                <a:ea typeface="+mn-ea"/>
+                <a:cs typeface="+mn-cs"/>
+              </a:rPr>
+              <a:t>Jupyter</a:t>
+            </a:r>
+            <a:r>
+              <a:rPr lang="en-US" sz="1200" b="1" i="0" kern="1200" dirty="0">
+                <a:solidFill>
+                  <a:schemeClr val="tx1"/>
+                </a:solidFill>
+                <a:effectLst/>
+                <a:latin typeface="+mn-lt"/>
+                <a:ea typeface="+mn-ea"/>
+                <a:cs typeface="+mn-cs"/>
+              </a:rPr>
+              <a:t> Notebook</a:t>
+            </a:r>
+            <a:r>
+              <a:rPr lang="en-US" sz="1200" b="0" i="0" kern="1200" dirty="0">
+                <a:solidFill>
+                  <a:schemeClr val="tx1"/>
+                </a:solidFill>
+                <a:effectLst/>
+                <a:latin typeface="+mn-lt"/>
+                <a:ea typeface="+mn-ea"/>
+                <a:cs typeface="+mn-cs"/>
+              </a:rPr>
+              <a:t>. Wir </a:t>
+            </a:r>
+            <a:r>
+              <a:rPr lang="en-US" sz="1200" b="0" i="0" kern="1200" dirty="0" err="1">
+                <a:solidFill>
+                  <a:schemeClr val="tx1"/>
+                </a:solidFill>
+                <a:effectLst/>
+                <a:latin typeface="+mn-lt"/>
+                <a:ea typeface="+mn-ea"/>
+                <a:cs typeface="+mn-cs"/>
+              </a:rPr>
+              <a:t>lernen</a:t>
+            </a:r>
+            <a:r>
+              <a:rPr lang="en-US" sz="1200" b="0" i="0" kern="1200" dirty="0">
+                <a:solidFill>
+                  <a:schemeClr val="tx1"/>
+                </a:solidFill>
+                <a:effectLst/>
+                <a:latin typeface="+mn-lt"/>
+                <a:ea typeface="+mn-ea"/>
+                <a:cs typeface="+mn-cs"/>
+              </a:rPr>
+              <a:t> den </a:t>
+            </a:r>
+            <a:r>
+              <a:rPr lang="en-US" sz="1200" b="0" i="0" kern="1200" dirty="0" err="1">
+                <a:solidFill>
+                  <a:schemeClr val="tx1"/>
+                </a:solidFill>
+                <a:effectLst/>
+                <a:latin typeface="+mn-lt"/>
+                <a:ea typeface="+mn-ea"/>
+                <a:cs typeface="+mn-cs"/>
+              </a:rPr>
+              <a:t>Unterschied</a:t>
+            </a:r>
+            <a:r>
+              <a:rPr lang="en-US" sz="1200" b="0" i="0" kern="1200" dirty="0">
+                <a:solidFill>
+                  <a:schemeClr val="tx1"/>
+                </a:solidFill>
+                <a:effectLst/>
+                <a:latin typeface="+mn-lt"/>
+                <a:ea typeface="+mn-ea"/>
+                <a:cs typeface="+mn-cs"/>
+              </a:rPr>
+              <a:t> </a:t>
+            </a:r>
+            <a:r>
+              <a:rPr lang="en-US" sz="1200" b="0" i="0" kern="1200" dirty="0" err="1">
+                <a:solidFill>
+                  <a:schemeClr val="tx1"/>
+                </a:solidFill>
+                <a:effectLst/>
+                <a:latin typeface="+mn-lt"/>
+                <a:ea typeface="+mn-ea"/>
+                <a:cs typeface="+mn-cs"/>
+              </a:rPr>
+              <a:t>zwischen</a:t>
+            </a:r>
+            <a:r>
+              <a:rPr lang="en-US" sz="1200" b="0" i="0" kern="1200" dirty="0">
+                <a:solidFill>
+                  <a:schemeClr val="tx1"/>
+                </a:solidFill>
+                <a:effectLst/>
+                <a:latin typeface="+mn-lt"/>
+                <a:ea typeface="+mn-ea"/>
+                <a:cs typeface="+mn-cs"/>
+              </a:rPr>
+              <a:t> Daten, </a:t>
+            </a:r>
+            <a:r>
+              <a:rPr lang="en-US" sz="1200" b="0" i="0" kern="1200" dirty="0" err="1">
+                <a:solidFill>
+                  <a:schemeClr val="tx1"/>
+                </a:solidFill>
+                <a:effectLst/>
+                <a:latin typeface="+mn-lt"/>
+                <a:ea typeface="+mn-ea"/>
+                <a:cs typeface="+mn-cs"/>
+              </a:rPr>
+              <a:t>Informationen</a:t>
+            </a:r>
+            <a:r>
+              <a:rPr lang="en-US" sz="1200" b="0" i="0" kern="1200" dirty="0">
+                <a:solidFill>
+                  <a:schemeClr val="tx1"/>
+                </a:solidFill>
+                <a:effectLst/>
+                <a:latin typeface="+mn-lt"/>
+                <a:ea typeface="+mn-ea"/>
+                <a:cs typeface="+mn-cs"/>
+              </a:rPr>
+              <a:t> und </a:t>
+            </a:r>
+            <a:r>
+              <a:rPr lang="en-US" sz="1200" b="0" i="0" kern="1200" dirty="0" err="1">
+                <a:solidFill>
+                  <a:schemeClr val="tx1"/>
+                </a:solidFill>
+                <a:effectLst/>
+                <a:latin typeface="+mn-lt"/>
+                <a:ea typeface="+mn-ea"/>
+                <a:cs typeface="+mn-cs"/>
+              </a:rPr>
+              <a:t>Datensätzen</a:t>
+            </a:r>
+            <a:r>
+              <a:rPr lang="en-US" sz="1200" b="0" i="0" kern="1200" dirty="0">
+                <a:solidFill>
+                  <a:schemeClr val="tx1"/>
+                </a:solidFill>
+                <a:effectLst/>
+                <a:latin typeface="+mn-lt"/>
+                <a:ea typeface="+mn-ea"/>
+                <a:cs typeface="+mn-cs"/>
+              </a:rPr>
+              <a:t>."</a:t>
+            </a:r>
+          </a:p>
+          <a:p>
+            <a:pPr rtl="0"/>
+            <a:r>
+              <a:rPr lang="en-US" sz="1200" b="1" i="0" kern="1200" dirty="0">
+                <a:solidFill>
+                  <a:schemeClr val="tx1"/>
+                </a:solidFill>
+                <a:effectLst/>
+                <a:latin typeface="+mn-lt"/>
+                <a:ea typeface="+mn-ea"/>
+                <a:cs typeface="+mn-cs"/>
+              </a:rPr>
+              <a:t>Key words:</a:t>
+            </a:r>
+            <a:r>
+              <a:rPr lang="en-US" sz="1200" b="0" i="0" kern="1200" dirty="0">
+                <a:solidFill>
+                  <a:schemeClr val="tx1"/>
+                </a:solidFill>
+                <a:effectLst/>
+                <a:latin typeface="+mn-lt"/>
+                <a:ea typeface="+mn-ea"/>
+                <a:cs typeface="+mn-cs"/>
+              </a:rPr>
+              <a:t> </a:t>
+            </a:r>
+            <a:r>
+              <a:rPr lang="en-US" sz="1200" b="0" i="1" kern="1200" dirty="0" err="1">
+                <a:solidFill>
+                  <a:schemeClr val="tx1"/>
+                </a:solidFill>
+                <a:effectLst/>
+                <a:latin typeface="+mn-lt"/>
+                <a:ea typeface="+mn-ea"/>
+                <a:cs typeface="+mn-cs"/>
+              </a:rPr>
+              <a:t>Bibliotheken</a:t>
+            </a:r>
+            <a:r>
+              <a:rPr lang="en-US" sz="1200" b="0" i="1" kern="1200" dirty="0">
+                <a:solidFill>
+                  <a:schemeClr val="tx1"/>
+                </a:solidFill>
+                <a:effectLst/>
+                <a:latin typeface="+mn-lt"/>
+                <a:ea typeface="+mn-ea"/>
+                <a:cs typeface="+mn-cs"/>
+              </a:rPr>
+              <a:t> </a:t>
+            </a:r>
+            <a:r>
+              <a:rPr lang="en-US" sz="1200" b="0" i="1" kern="1200" dirty="0" err="1">
+                <a:solidFill>
+                  <a:schemeClr val="tx1"/>
+                </a:solidFill>
+                <a:effectLst/>
+                <a:latin typeface="+mn-lt"/>
+                <a:ea typeface="+mn-ea"/>
+                <a:cs typeface="+mn-cs"/>
+              </a:rPr>
+              <a:t>installieren</a:t>
+            </a:r>
+            <a:r>
+              <a:rPr lang="en-US" sz="1200" b="0" i="0" kern="1200" dirty="0">
+                <a:solidFill>
+                  <a:schemeClr val="tx1"/>
+                </a:solidFill>
+                <a:effectLst/>
+                <a:latin typeface="+mn-lt"/>
+                <a:ea typeface="+mn-ea"/>
+                <a:cs typeface="+mn-cs"/>
+              </a:rPr>
+              <a:t> (install libraries), </a:t>
+            </a:r>
+            <a:r>
+              <a:rPr lang="en-US" sz="1200" b="0" i="1" kern="1200" dirty="0" err="1">
+                <a:solidFill>
+                  <a:schemeClr val="tx1"/>
+                </a:solidFill>
+                <a:effectLst/>
+                <a:latin typeface="+mn-lt"/>
+                <a:ea typeface="+mn-ea"/>
+                <a:cs typeface="+mn-cs"/>
+              </a:rPr>
+              <a:t>Überblick</a:t>
+            </a:r>
+            <a:r>
+              <a:rPr lang="en-US" sz="1200" b="0" i="0" kern="1200" dirty="0">
+                <a:solidFill>
+                  <a:schemeClr val="tx1"/>
+                </a:solidFill>
+                <a:effectLst/>
+                <a:latin typeface="+mn-lt"/>
+                <a:ea typeface="+mn-ea"/>
+                <a:cs typeface="+mn-cs"/>
+              </a:rPr>
+              <a:t> (overview).</a:t>
+            </a:r>
+          </a:p>
+          <a:p>
+            <a:pPr rtl="0"/>
+            <a:r>
+              <a:rPr lang="en-US" sz="1200" b="1" i="0" kern="1200" dirty="0">
+                <a:solidFill>
+                  <a:schemeClr val="tx1"/>
+                </a:solidFill>
+                <a:effectLst/>
+                <a:latin typeface="+mn-lt"/>
+                <a:ea typeface="+mn-ea"/>
+                <a:cs typeface="+mn-cs"/>
+              </a:rPr>
+              <a:t>2. </a:t>
+            </a:r>
+            <a:r>
+              <a:rPr lang="en-US" sz="1200" b="1" i="0" kern="1200" dirty="0" err="1">
+                <a:solidFill>
+                  <a:schemeClr val="tx1"/>
+                </a:solidFill>
+                <a:effectLst/>
+                <a:latin typeface="+mn-lt"/>
+                <a:ea typeface="+mn-ea"/>
+                <a:cs typeface="+mn-cs"/>
+              </a:rPr>
+              <a:t>Analyseziele</a:t>
+            </a:r>
+            <a:r>
+              <a:rPr lang="en-US" sz="1200" b="1" i="0" kern="1200" dirty="0">
+                <a:solidFill>
+                  <a:schemeClr val="tx1"/>
+                </a:solidFill>
+                <a:effectLst/>
+                <a:latin typeface="+mn-lt"/>
+                <a:ea typeface="+mn-ea"/>
+                <a:cs typeface="+mn-cs"/>
+              </a:rPr>
+              <a:t> &amp; KPIs </a:t>
+            </a:r>
+            <a:r>
+              <a:rPr lang="en-US" sz="1200" b="1" i="0" kern="1200" dirty="0" err="1">
+                <a:solidFill>
+                  <a:schemeClr val="tx1"/>
+                </a:solidFill>
+                <a:effectLst/>
+                <a:latin typeface="+mn-lt"/>
+                <a:ea typeface="+mn-ea"/>
+                <a:cs typeface="+mn-cs"/>
+              </a:rPr>
+              <a:t>definieren</a:t>
+            </a:r>
+            <a:endParaRPr lang="en-US" sz="1200" b="1" i="0" kern="1200" dirty="0">
+              <a:solidFill>
+                <a:schemeClr val="tx1"/>
+              </a:solidFill>
+              <a:effectLst/>
+              <a:latin typeface="+mn-lt"/>
+              <a:ea typeface="+mn-ea"/>
+              <a:cs typeface="+mn-cs"/>
+            </a:endParaRPr>
+          </a:p>
+          <a:p>
+            <a:pPr rtl="0"/>
+            <a:r>
+              <a:rPr lang="en-US" sz="1200" b="0" i="0" kern="1200" dirty="0">
+                <a:solidFill>
+                  <a:schemeClr val="tx1"/>
+                </a:solidFill>
+                <a:effectLst/>
+                <a:latin typeface="+mn-lt"/>
+                <a:ea typeface="+mn-ea"/>
+                <a:cs typeface="+mn-cs"/>
+              </a:rPr>
+              <a:t>"Bevor </a:t>
+            </a:r>
+            <a:r>
+              <a:rPr lang="en-US" sz="1200" b="0" i="0" kern="1200" dirty="0" err="1">
+                <a:solidFill>
+                  <a:schemeClr val="tx1"/>
+                </a:solidFill>
+                <a:effectLst/>
+                <a:latin typeface="+mn-lt"/>
+                <a:ea typeface="+mn-ea"/>
+                <a:cs typeface="+mn-cs"/>
+              </a:rPr>
+              <a:t>wir</a:t>
+            </a:r>
+            <a:r>
+              <a:rPr lang="en-US" sz="1200" b="0" i="0" kern="1200" dirty="0">
+                <a:solidFill>
+                  <a:schemeClr val="tx1"/>
+                </a:solidFill>
+                <a:effectLst/>
+                <a:latin typeface="+mn-lt"/>
+                <a:ea typeface="+mn-ea"/>
+                <a:cs typeface="+mn-cs"/>
+              </a:rPr>
+              <a:t> </a:t>
+            </a:r>
+            <a:r>
+              <a:rPr lang="en-US" sz="1200" b="0" i="0" kern="1200" dirty="0" err="1">
+                <a:solidFill>
+                  <a:schemeClr val="tx1"/>
+                </a:solidFill>
+                <a:effectLst/>
+                <a:latin typeface="+mn-lt"/>
+                <a:ea typeface="+mn-ea"/>
+                <a:cs typeface="+mn-cs"/>
+              </a:rPr>
+              <a:t>rechnen</a:t>
+            </a:r>
+            <a:r>
+              <a:rPr lang="en-US" sz="1200" b="0" i="0" kern="1200" dirty="0">
+                <a:solidFill>
+                  <a:schemeClr val="tx1"/>
+                </a:solidFill>
+                <a:effectLst/>
+                <a:latin typeface="+mn-lt"/>
+                <a:ea typeface="+mn-ea"/>
+                <a:cs typeface="+mn-cs"/>
+              </a:rPr>
+              <a:t>, </a:t>
+            </a:r>
+            <a:r>
+              <a:rPr lang="en-US" sz="1200" b="0" i="0" kern="1200" dirty="0" err="1">
+                <a:solidFill>
+                  <a:schemeClr val="tx1"/>
+                </a:solidFill>
+                <a:effectLst/>
+                <a:latin typeface="+mn-lt"/>
+                <a:ea typeface="+mn-ea"/>
+                <a:cs typeface="+mn-cs"/>
+              </a:rPr>
+              <a:t>müssen</a:t>
+            </a:r>
+            <a:r>
+              <a:rPr lang="en-US" sz="1200" b="0" i="0" kern="1200" dirty="0">
+                <a:solidFill>
+                  <a:schemeClr val="tx1"/>
+                </a:solidFill>
+                <a:effectLst/>
+                <a:latin typeface="+mn-lt"/>
+                <a:ea typeface="+mn-ea"/>
+                <a:cs typeface="+mn-cs"/>
+              </a:rPr>
+              <a:t> </a:t>
+            </a:r>
+            <a:r>
+              <a:rPr lang="en-US" sz="1200" b="0" i="0" kern="1200" dirty="0" err="1">
+                <a:solidFill>
+                  <a:schemeClr val="tx1"/>
+                </a:solidFill>
+                <a:effectLst/>
+                <a:latin typeface="+mn-lt"/>
+                <a:ea typeface="+mn-ea"/>
+                <a:cs typeface="+mn-cs"/>
+              </a:rPr>
+              <a:t>wir</a:t>
+            </a:r>
+            <a:r>
+              <a:rPr lang="en-US" sz="1200" b="0" i="0" kern="1200" dirty="0">
+                <a:solidFill>
+                  <a:schemeClr val="tx1"/>
+                </a:solidFill>
+                <a:effectLst/>
+                <a:latin typeface="+mn-lt"/>
+                <a:ea typeface="+mn-ea"/>
+                <a:cs typeface="+mn-cs"/>
+              </a:rPr>
+              <a:t> </a:t>
+            </a:r>
+            <a:r>
+              <a:rPr lang="en-US" sz="1200" b="0" i="0" kern="1200" dirty="0" err="1">
+                <a:solidFill>
+                  <a:schemeClr val="tx1"/>
+                </a:solidFill>
+                <a:effectLst/>
+                <a:latin typeface="+mn-lt"/>
+                <a:ea typeface="+mn-ea"/>
+                <a:cs typeface="+mn-cs"/>
+              </a:rPr>
+              <a:t>Ziele</a:t>
+            </a:r>
+            <a:r>
+              <a:rPr lang="en-US" sz="1200" b="0" i="0" kern="1200" dirty="0">
+                <a:solidFill>
+                  <a:schemeClr val="tx1"/>
+                </a:solidFill>
+                <a:effectLst/>
+                <a:latin typeface="+mn-lt"/>
+                <a:ea typeface="+mn-ea"/>
+                <a:cs typeface="+mn-cs"/>
+              </a:rPr>
+              <a:t> </a:t>
+            </a:r>
+            <a:r>
+              <a:rPr lang="en-US" sz="1200" b="0" i="0" kern="1200" dirty="0" err="1">
+                <a:solidFill>
+                  <a:schemeClr val="tx1"/>
+                </a:solidFill>
+                <a:effectLst/>
+                <a:latin typeface="+mn-lt"/>
+                <a:ea typeface="+mn-ea"/>
+                <a:cs typeface="+mn-cs"/>
+              </a:rPr>
+              <a:t>identifizieren</a:t>
+            </a:r>
+            <a:r>
+              <a:rPr lang="en-US" sz="1200" b="0" i="0" kern="1200" dirty="0">
+                <a:solidFill>
+                  <a:schemeClr val="tx1"/>
+                </a:solidFill>
+                <a:effectLst/>
+                <a:latin typeface="+mn-lt"/>
+                <a:ea typeface="+mn-ea"/>
+                <a:cs typeface="+mn-cs"/>
+              </a:rPr>
+              <a:t>. Wir </a:t>
+            </a:r>
+            <a:r>
+              <a:rPr lang="en-US" sz="1200" b="0" i="0" kern="1200" dirty="0" err="1">
+                <a:solidFill>
+                  <a:schemeClr val="tx1"/>
+                </a:solidFill>
+                <a:effectLst/>
+                <a:latin typeface="+mn-lt"/>
+                <a:ea typeface="+mn-ea"/>
+                <a:cs typeface="+mn-cs"/>
+              </a:rPr>
+              <a:t>verknüpfen</a:t>
+            </a:r>
+            <a:r>
+              <a:rPr lang="en-US" sz="1200" b="0" i="0" kern="1200" dirty="0">
+                <a:solidFill>
+                  <a:schemeClr val="tx1"/>
+                </a:solidFill>
+                <a:effectLst/>
+                <a:latin typeface="+mn-lt"/>
+                <a:ea typeface="+mn-ea"/>
+                <a:cs typeface="+mn-cs"/>
+              </a:rPr>
+              <a:t> </a:t>
+            </a:r>
+            <a:r>
+              <a:rPr lang="en-US" sz="1200" b="1" i="0" kern="1200" dirty="0">
+                <a:solidFill>
+                  <a:schemeClr val="tx1"/>
+                </a:solidFill>
+                <a:effectLst/>
+                <a:latin typeface="+mn-lt"/>
+                <a:ea typeface="+mn-ea"/>
+                <a:cs typeface="+mn-cs"/>
+              </a:rPr>
+              <a:t>KPIs</a:t>
+            </a:r>
+            <a:r>
+              <a:rPr lang="en-US" sz="1200" b="0" i="0" kern="1200" dirty="0">
+                <a:solidFill>
+                  <a:schemeClr val="tx1"/>
+                </a:solidFill>
+                <a:effectLst/>
+                <a:latin typeface="+mn-lt"/>
+                <a:ea typeface="+mn-ea"/>
+                <a:cs typeface="+mn-cs"/>
+              </a:rPr>
+              <a:t> </a:t>
+            </a:r>
+            <a:r>
+              <a:rPr lang="en-US" sz="1200" b="0" i="0" kern="1200" dirty="0" err="1">
+                <a:solidFill>
+                  <a:schemeClr val="tx1"/>
+                </a:solidFill>
+                <a:effectLst/>
+                <a:latin typeface="+mn-lt"/>
+                <a:ea typeface="+mn-ea"/>
+                <a:cs typeface="+mn-cs"/>
+              </a:rPr>
+              <a:t>mit</a:t>
+            </a:r>
+            <a:r>
+              <a:rPr lang="en-US" sz="1200" b="0" i="0" kern="1200" dirty="0">
+                <a:solidFill>
+                  <a:schemeClr val="tx1"/>
+                </a:solidFill>
+                <a:effectLst/>
+                <a:latin typeface="+mn-lt"/>
+                <a:ea typeface="+mn-ea"/>
+                <a:cs typeface="+mn-cs"/>
+              </a:rPr>
+              <a:t> </a:t>
+            </a:r>
+            <a:r>
+              <a:rPr lang="en-US" sz="1200" b="0" i="0" kern="1200" dirty="0" err="1">
+                <a:solidFill>
+                  <a:schemeClr val="tx1"/>
+                </a:solidFill>
+                <a:effectLst/>
+                <a:latin typeface="+mn-lt"/>
+                <a:ea typeface="+mn-ea"/>
+                <a:cs typeface="+mn-cs"/>
+              </a:rPr>
+              <a:t>echten</a:t>
+            </a:r>
+            <a:r>
+              <a:rPr lang="en-US" sz="1200" b="0" i="0" kern="1200" dirty="0">
+                <a:solidFill>
+                  <a:schemeClr val="tx1"/>
+                </a:solidFill>
+                <a:effectLst/>
+                <a:latin typeface="+mn-lt"/>
+                <a:ea typeface="+mn-ea"/>
+                <a:cs typeface="+mn-cs"/>
+              </a:rPr>
+              <a:t> </a:t>
+            </a:r>
+            <a:r>
+              <a:rPr lang="en-US" sz="1200" b="0" i="0" kern="1200" dirty="0" err="1">
+                <a:solidFill>
+                  <a:schemeClr val="tx1"/>
+                </a:solidFill>
+                <a:effectLst/>
+                <a:latin typeface="+mn-lt"/>
+                <a:ea typeface="+mn-ea"/>
+                <a:cs typeface="+mn-cs"/>
+              </a:rPr>
+              <a:t>Geschäftsentscheidungen</a:t>
+            </a:r>
+            <a:r>
+              <a:rPr lang="en-US" sz="1200" b="0" i="0" kern="1200" dirty="0">
+                <a:solidFill>
+                  <a:schemeClr val="tx1"/>
+                </a:solidFill>
+                <a:effectLst/>
+                <a:latin typeface="+mn-lt"/>
+                <a:ea typeface="+mn-ea"/>
+                <a:cs typeface="+mn-cs"/>
+              </a:rPr>
+              <a:t>."</a:t>
+            </a:r>
+          </a:p>
+          <a:p>
+            <a:pPr rtl="0"/>
+            <a:r>
+              <a:rPr lang="en-US" sz="1200" b="1" i="0" kern="1200" dirty="0">
+                <a:solidFill>
+                  <a:schemeClr val="tx1"/>
+                </a:solidFill>
+                <a:effectLst/>
+                <a:latin typeface="+mn-lt"/>
+                <a:ea typeface="+mn-ea"/>
+                <a:cs typeface="+mn-cs"/>
+              </a:rPr>
+              <a:t>Key words:</a:t>
+            </a:r>
+            <a:r>
+              <a:rPr lang="en-US" sz="1200" b="0" i="0" kern="1200" dirty="0">
+                <a:solidFill>
+                  <a:schemeClr val="tx1"/>
+                </a:solidFill>
+                <a:effectLst/>
+                <a:latin typeface="+mn-lt"/>
+                <a:ea typeface="+mn-ea"/>
+                <a:cs typeface="+mn-cs"/>
+              </a:rPr>
+              <a:t> </a:t>
+            </a:r>
+            <a:r>
+              <a:rPr lang="en-US" sz="1200" b="0" i="1" kern="1200" dirty="0" err="1">
+                <a:solidFill>
+                  <a:schemeClr val="tx1"/>
+                </a:solidFill>
+                <a:effectLst/>
+                <a:latin typeface="+mn-lt"/>
+                <a:ea typeface="+mn-ea"/>
+                <a:cs typeface="+mn-cs"/>
+              </a:rPr>
+              <a:t>Analysefragen</a:t>
+            </a:r>
+            <a:r>
+              <a:rPr lang="en-US" sz="1200" b="0" i="0" kern="1200" dirty="0">
+                <a:solidFill>
+                  <a:schemeClr val="tx1"/>
+                </a:solidFill>
+                <a:effectLst/>
+                <a:latin typeface="+mn-lt"/>
+                <a:ea typeface="+mn-ea"/>
+                <a:cs typeface="+mn-cs"/>
+              </a:rPr>
+              <a:t> (analysis questions), </a:t>
+            </a:r>
+            <a:r>
+              <a:rPr lang="en-US" sz="1200" b="0" i="1" kern="1200" dirty="0" err="1">
+                <a:solidFill>
+                  <a:schemeClr val="tx1"/>
+                </a:solidFill>
+                <a:effectLst/>
+                <a:latin typeface="+mn-lt"/>
+                <a:ea typeface="+mn-ea"/>
+                <a:cs typeface="+mn-cs"/>
+              </a:rPr>
+              <a:t>verknüpfen</a:t>
+            </a:r>
+            <a:r>
+              <a:rPr lang="en-US" sz="1200" b="0" i="0" kern="1200" dirty="0">
+                <a:solidFill>
+                  <a:schemeClr val="tx1"/>
+                </a:solidFill>
+                <a:effectLst/>
+                <a:latin typeface="+mn-lt"/>
+                <a:ea typeface="+mn-ea"/>
+                <a:cs typeface="+mn-cs"/>
+              </a:rPr>
+              <a:t> (to link).</a:t>
+            </a:r>
+          </a:p>
+          <a:p>
+            <a:pPr rtl="0"/>
+            <a:r>
+              <a:rPr lang="en-US" sz="1200" b="1" i="0" kern="1200" dirty="0">
+                <a:solidFill>
+                  <a:schemeClr val="tx1"/>
+                </a:solidFill>
+                <a:effectLst/>
+                <a:latin typeface="+mn-lt"/>
+                <a:ea typeface="+mn-ea"/>
+                <a:cs typeface="+mn-cs"/>
+              </a:rPr>
+              <a:t>3. </a:t>
+            </a:r>
+            <a:r>
+              <a:rPr lang="en-US" sz="1200" b="1" i="0" kern="1200" dirty="0" err="1">
+                <a:solidFill>
+                  <a:schemeClr val="tx1"/>
+                </a:solidFill>
+                <a:effectLst/>
+                <a:latin typeface="+mn-lt"/>
+                <a:ea typeface="+mn-ea"/>
+                <a:cs typeface="+mn-cs"/>
+              </a:rPr>
+              <a:t>Datenerhebung</a:t>
+            </a:r>
+            <a:r>
+              <a:rPr lang="en-US" sz="1200" b="1" i="0" kern="1200" dirty="0">
+                <a:solidFill>
+                  <a:schemeClr val="tx1"/>
+                </a:solidFill>
+                <a:effectLst/>
+                <a:latin typeface="+mn-lt"/>
+                <a:ea typeface="+mn-ea"/>
+                <a:cs typeface="+mn-cs"/>
+              </a:rPr>
+              <a:t> &amp; </a:t>
+            </a:r>
+            <a:r>
+              <a:rPr lang="en-US" sz="1200" b="1" i="0" kern="1200" dirty="0" err="1">
+                <a:solidFill>
+                  <a:schemeClr val="tx1"/>
+                </a:solidFill>
+                <a:effectLst/>
+                <a:latin typeface="+mn-lt"/>
+                <a:ea typeface="+mn-ea"/>
+                <a:cs typeface="+mn-cs"/>
+              </a:rPr>
+              <a:t>Datenqualität</a:t>
+            </a:r>
+            <a:endParaRPr lang="en-US" sz="1200" b="1" i="0" kern="1200" dirty="0">
+              <a:solidFill>
+                <a:schemeClr val="tx1"/>
+              </a:solidFill>
+              <a:effectLst/>
+              <a:latin typeface="+mn-lt"/>
+              <a:ea typeface="+mn-ea"/>
+              <a:cs typeface="+mn-cs"/>
+            </a:endParaRPr>
+          </a:p>
+          <a:p>
+            <a:pPr rtl="0"/>
+            <a:r>
+              <a:rPr lang="en-US" sz="1200" b="0" i="0" kern="1200" dirty="0">
+                <a:solidFill>
+                  <a:schemeClr val="tx1"/>
+                </a:solidFill>
+                <a:effectLst/>
+                <a:latin typeface="+mn-lt"/>
+                <a:ea typeface="+mn-ea"/>
+                <a:cs typeface="+mn-cs"/>
+              </a:rPr>
+              <a:t>"Wie </a:t>
+            </a:r>
+            <a:r>
+              <a:rPr lang="en-US" sz="1200" b="0" i="0" kern="1200" dirty="0" err="1">
+                <a:solidFill>
+                  <a:schemeClr val="tx1"/>
+                </a:solidFill>
+                <a:effectLst/>
+                <a:latin typeface="+mn-lt"/>
+                <a:ea typeface="+mn-ea"/>
+                <a:cs typeface="+mn-cs"/>
+              </a:rPr>
+              <a:t>kommen</a:t>
+            </a:r>
+            <a:r>
+              <a:rPr lang="en-US" sz="1200" b="0" i="0" kern="1200" dirty="0">
+                <a:solidFill>
+                  <a:schemeClr val="tx1"/>
+                </a:solidFill>
+                <a:effectLst/>
+                <a:latin typeface="+mn-lt"/>
+                <a:ea typeface="+mn-ea"/>
+                <a:cs typeface="+mn-cs"/>
+              </a:rPr>
+              <a:t> </a:t>
+            </a:r>
+            <a:r>
+              <a:rPr lang="en-US" sz="1200" b="0" i="0" kern="1200" dirty="0" err="1">
+                <a:solidFill>
+                  <a:schemeClr val="tx1"/>
+                </a:solidFill>
+                <a:effectLst/>
+                <a:latin typeface="+mn-lt"/>
+                <a:ea typeface="+mn-ea"/>
+                <a:cs typeface="+mn-cs"/>
+              </a:rPr>
+              <a:t>wir</a:t>
+            </a:r>
+            <a:r>
+              <a:rPr lang="en-US" sz="1200" b="0" i="0" kern="1200" dirty="0">
+                <a:solidFill>
+                  <a:schemeClr val="tx1"/>
+                </a:solidFill>
+                <a:effectLst/>
+                <a:latin typeface="+mn-lt"/>
+                <a:ea typeface="+mn-ea"/>
+                <a:cs typeface="+mn-cs"/>
+              </a:rPr>
+              <a:t> an die Daten? Wir </a:t>
+            </a:r>
+            <a:r>
+              <a:rPr lang="en-US" sz="1200" b="0" i="0" kern="1200" dirty="0" err="1">
+                <a:solidFill>
+                  <a:schemeClr val="tx1"/>
+                </a:solidFill>
+                <a:effectLst/>
+                <a:latin typeface="+mn-lt"/>
+                <a:ea typeface="+mn-ea"/>
+                <a:cs typeface="+mn-cs"/>
+              </a:rPr>
+              <a:t>nutzen</a:t>
+            </a:r>
+            <a:r>
+              <a:rPr lang="en-US" sz="1200" b="0" i="0" kern="1200" dirty="0">
+                <a:solidFill>
+                  <a:schemeClr val="tx1"/>
+                </a:solidFill>
+                <a:effectLst/>
+                <a:latin typeface="+mn-lt"/>
+                <a:ea typeface="+mn-ea"/>
+                <a:cs typeface="+mn-cs"/>
+              </a:rPr>
+              <a:t> </a:t>
+            </a:r>
+            <a:r>
+              <a:rPr lang="en-US" sz="1200" b="1" i="0" kern="1200" dirty="0">
+                <a:solidFill>
+                  <a:schemeClr val="tx1"/>
+                </a:solidFill>
+                <a:effectLst/>
+                <a:latin typeface="+mn-lt"/>
+                <a:ea typeface="+mn-ea"/>
+                <a:cs typeface="+mn-cs"/>
+              </a:rPr>
+              <a:t>APIs</a:t>
+            </a:r>
+            <a:r>
+              <a:rPr lang="en-US" sz="1200" b="0" i="0" kern="1200" dirty="0">
+                <a:solidFill>
+                  <a:schemeClr val="tx1"/>
+                </a:solidFill>
+                <a:effectLst/>
+                <a:latin typeface="+mn-lt"/>
+                <a:ea typeface="+mn-ea"/>
+                <a:cs typeface="+mn-cs"/>
+              </a:rPr>
+              <a:t> </a:t>
+            </a:r>
+            <a:r>
+              <a:rPr lang="en-US" sz="1200" b="0" i="0" kern="1200" dirty="0" err="1">
+                <a:solidFill>
+                  <a:schemeClr val="tx1"/>
+                </a:solidFill>
+                <a:effectLst/>
+                <a:latin typeface="+mn-lt"/>
+                <a:ea typeface="+mn-ea"/>
+                <a:cs typeface="+mn-cs"/>
+              </a:rPr>
+              <a:t>oder</a:t>
+            </a:r>
+            <a:r>
+              <a:rPr lang="en-US" sz="1200" b="0" i="0" kern="1200" dirty="0">
+                <a:solidFill>
+                  <a:schemeClr val="tx1"/>
+                </a:solidFill>
+                <a:effectLst/>
+                <a:latin typeface="+mn-lt"/>
+                <a:ea typeface="+mn-ea"/>
+                <a:cs typeface="+mn-cs"/>
+              </a:rPr>
+              <a:t> </a:t>
+            </a:r>
+            <a:r>
+              <a:rPr lang="en-US" sz="1200" b="0" i="0" kern="1200" dirty="0" err="1">
+                <a:solidFill>
+                  <a:schemeClr val="tx1"/>
+                </a:solidFill>
+                <a:effectLst/>
+                <a:latin typeface="+mn-lt"/>
+                <a:ea typeface="+mn-ea"/>
+                <a:cs typeface="+mn-cs"/>
+              </a:rPr>
+              <a:t>lokale</a:t>
+            </a:r>
+            <a:r>
+              <a:rPr lang="en-US" sz="1200" b="0" i="0" kern="1200" dirty="0">
+                <a:solidFill>
+                  <a:schemeClr val="tx1"/>
+                </a:solidFill>
+                <a:effectLst/>
+                <a:latin typeface="+mn-lt"/>
+                <a:ea typeface="+mn-ea"/>
+                <a:cs typeface="+mn-cs"/>
+              </a:rPr>
+              <a:t> </a:t>
+            </a:r>
+            <a:r>
+              <a:rPr lang="en-US" sz="1200" b="0" i="0" kern="1200" dirty="0" err="1">
+                <a:solidFill>
+                  <a:schemeClr val="tx1"/>
+                </a:solidFill>
+                <a:effectLst/>
+                <a:latin typeface="+mn-lt"/>
+                <a:ea typeface="+mn-ea"/>
+                <a:cs typeface="+mn-cs"/>
+              </a:rPr>
+              <a:t>Dateien</a:t>
+            </a:r>
+            <a:r>
+              <a:rPr lang="en-US" sz="1200" b="0" i="0" kern="1200" dirty="0">
+                <a:solidFill>
+                  <a:schemeClr val="tx1"/>
+                </a:solidFill>
+                <a:effectLst/>
+                <a:latin typeface="+mn-lt"/>
+                <a:ea typeface="+mn-ea"/>
+                <a:cs typeface="+mn-cs"/>
+              </a:rPr>
+              <a:t>. </a:t>
+            </a:r>
+            <a:r>
+              <a:rPr lang="en-US" sz="1200" b="0" i="0" kern="1200" dirty="0" err="1">
+                <a:solidFill>
+                  <a:schemeClr val="tx1"/>
+                </a:solidFill>
+                <a:effectLst/>
+                <a:latin typeface="+mn-lt"/>
+                <a:ea typeface="+mn-ea"/>
+                <a:cs typeface="+mn-cs"/>
+              </a:rPr>
+              <a:t>Wichtig</a:t>
+            </a:r>
+            <a:r>
+              <a:rPr lang="en-US" sz="1200" b="0" i="0" kern="1200" dirty="0">
+                <a:solidFill>
+                  <a:schemeClr val="tx1"/>
+                </a:solidFill>
+                <a:effectLst/>
+                <a:latin typeface="+mn-lt"/>
+                <a:ea typeface="+mn-ea"/>
+                <a:cs typeface="+mn-cs"/>
+              </a:rPr>
+              <a:t> </a:t>
+            </a:r>
+            <a:r>
+              <a:rPr lang="en-US" sz="1200" b="0" i="0" kern="1200" dirty="0" err="1">
+                <a:solidFill>
+                  <a:schemeClr val="tx1"/>
+                </a:solidFill>
+                <a:effectLst/>
+                <a:latin typeface="+mn-lt"/>
+                <a:ea typeface="+mn-ea"/>
+                <a:cs typeface="+mn-cs"/>
+              </a:rPr>
+              <a:t>ist</a:t>
+            </a:r>
+            <a:r>
+              <a:rPr lang="en-US" sz="1200" b="0" i="0" kern="1200" dirty="0">
+                <a:solidFill>
+                  <a:schemeClr val="tx1"/>
+                </a:solidFill>
+                <a:effectLst/>
+                <a:latin typeface="+mn-lt"/>
+                <a:ea typeface="+mn-ea"/>
+                <a:cs typeface="+mn-cs"/>
+              </a:rPr>
+              <a:t> </a:t>
+            </a:r>
+            <a:r>
+              <a:rPr lang="en-US" sz="1200" b="0" i="0" kern="1200" dirty="0" err="1">
+                <a:solidFill>
+                  <a:schemeClr val="tx1"/>
+                </a:solidFill>
+                <a:effectLst/>
+                <a:latin typeface="+mn-lt"/>
+                <a:ea typeface="+mn-ea"/>
+                <a:cs typeface="+mn-cs"/>
+              </a:rPr>
+              <a:t>hier</a:t>
+            </a:r>
+            <a:r>
+              <a:rPr lang="en-US" sz="1200" b="0" i="0" kern="1200" dirty="0">
+                <a:solidFill>
+                  <a:schemeClr val="tx1"/>
+                </a:solidFill>
+                <a:effectLst/>
+                <a:latin typeface="+mn-lt"/>
+                <a:ea typeface="+mn-ea"/>
+                <a:cs typeface="+mn-cs"/>
+              </a:rPr>
+              <a:t> die </a:t>
+            </a:r>
+            <a:r>
+              <a:rPr lang="en-US" sz="1200" b="0" i="0" kern="1200" dirty="0" err="1">
+                <a:solidFill>
+                  <a:schemeClr val="tx1"/>
+                </a:solidFill>
+                <a:effectLst/>
+                <a:latin typeface="+mn-lt"/>
+                <a:ea typeface="+mn-ea"/>
+                <a:cs typeface="+mn-cs"/>
+              </a:rPr>
+              <a:t>Qualität</a:t>
+            </a:r>
+            <a:r>
+              <a:rPr lang="en-US" sz="1200" b="0" i="0" kern="1200" dirty="0">
+                <a:solidFill>
+                  <a:schemeClr val="tx1"/>
+                </a:solidFill>
+                <a:effectLst/>
+                <a:latin typeface="+mn-lt"/>
+                <a:ea typeface="+mn-ea"/>
+                <a:cs typeface="+mn-cs"/>
+              </a:rPr>
+              <a:t>: Sind die Daten </a:t>
+            </a:r>
+            <a:r>
+              <a:rPr lang="en-US" sz="1200" b="0" i="0" kern="1200" dirty="0" err="1">
+                <a:solidFill>
+                  <a:schemeClr val="tx1"/>
+                </a:solidFill>
+                <a:effectLst/>
+                <a:latin typeface="+mn-lt"/>
+                <a:ea typeface="+mn-ea"/>
+                <a:cs typeface="+mn-cs"/>
+              </a:rPr>
+              <a:t>vollständig</a:t>
+            </a:r>
+            <a:r>
+              <a:rPr lang="en-US" sz="1200" b="0" i="0" kern="1200" dirty="0">
+                <a:solidFill>
+                  <a:schemeClr val="tx1"/>
+                </a:solidFill>
+                <a:effectLst/>
+                <a:latin typeface="+mn-lt"/>
+                <a:ea typeface="+mn-ea"/>
+                <a:cs typeface="+mn-cs"/>
+              </a:rPr>
+              <a:t> und </a:t>
+            </a:r>
+            <a:r>
+              <a:rPr lang="en-US" sz="1200" b="0" i="0" kern="1200" dirty="0" err="1">
+                <a:solidFill>
+                  <a:schemeClr val="tx1"/>
+                </a:solidFill>
+                <a:effectLst/>
+                <a:latin typeface="+mn-lt"/>
+                <a:ea typeface="+mn-ea"/>
+                <a:cs typeface="+mn-cs"/>
+              </a:rPr>
+              <a:t>konsistent</a:t>
+            </a:r>
+            <a:r>
+              <a:rPr lang="en-US" sz="1200" b="0" i="0" kern="1200" dirty="0">
+                <a:solidFill>
+                  <a:schemeClr val="tx1"/>
+                </a:solidFill>
+                <a:effectLst/>
+                <a:latin typeface="+mn-lt"/>
+                <a:ea typeface="+mn-ea"/>
+                <a:cs typeface="+mn-cs"/>
+              </a:rPr>
+              <a:t>?"</a:t>
+            </a:r>
+          </a:p>
+          <a:p>
+            <a:pPr rtl="0"/>
+            <a:r>
+              <a:rPr lang="en-US" sz="1200" b="1" i="0" kern="1200" dirty="0">
+                <a:solidFill>
+                  <a:schemeClr val="tx1"/>
+                </a:solidFill>
+                <a:effectLst/>
+                <a:latin typeface="+mn-lt"/>
+                <a:ea typeface="+mn-ea"/>
+                <a:cs typeface="+mn-cs"/>
+              </a:rPr>
+              <a:t>Key words:</a:t>
+            </a:r>
+            <a:r>
+              <a:rPr lang="en-US" sz="1200" b="0" i="0" kern="1200" dirty="0">
+                <a:solidFill>
+                  <a:schemeClr val="tx1"/>
+                </a:solidFill>
+                <a:effectLst/>
+                <a:latin typeface="+mn-lt"/>
+                <a:ea typeface="+mn-ea"/>
+                <a:cs typeface="+mn-cs"/>
+              </a:rPr>
+              <a:t> </a:t>
+            </a:r>
+            <a:r>
+              <a:rPr lang="en-US" sz="1200" b="0" i="1" kern="1200" dirty="0" err="1">
+                <a:solidFill>
+                  <a:schemeClr val="tx1"/>
+                </a:solidFill>
+                <a:effectLst/>
+                <a:latin typeface="+mn-lt"/>
+                <a:ea typeface="+mn-ea"/>
+                <a:cs typeface="+mn-cs"/>
+              </a:rPr>
+              <a:t>Vollständigkeit</a:t>
+            </a:r>
+            <a:r>
+              <a:rPr lang="en-US" sz="1200" b="0" i="0" kern="1200" dirty="0">
+                <a:solidFill>
+                  <a:schemeClr val="tx1"/>
+                </a:solidFill>
+                <a:effectLst/>
+                <a:latin typeface="+mn-lt"/>
+                <a:ea typeface="+mn-ea"/>
+                <a:cs typeface="+mn-cs"/>
+              </a:rPr>
+              <a:t> (completeness), </a:t>
+            </a:r>
+            <a:r>
+              <a:rPr lang="en-US" sz="1200" b="0" i="1" kern="1200" dirty="0" err="1">
+                <a:solidFill>
+                  <a:schemeClr val="tx1"/>
+                </a:solidFill>
+                <a:effectLst/>
+                <a:latin typeface="+mn-lt"/>
+                <a:ea typeface="+mn-ea"/>
+                <a:cs typeface="+mn-cs"/>
+              </a:rPr>
+              <a:t>Genauigkeit</a:t>
+            </a:r>
+            <a:r>
+              <a:rPr lang="en-US" sz="1200" b="0" i="0" kern="1200" dirty="0">
+                <a:solidFill>
+                  <a:schemeClr val="tx1"/>
+                </a:solidFill>
+                <a:effectLst/>
+                <a:latin typeface="+mn-lt"/>
+                <a:ea typeface="+mn-ea"/>
+                <a:cs typeface="+mn-cs"/>
+              </a:rPr>
+              <a:t> (accuracy).</a:t>
+            </a:r>
+          </a:p>
+          <a:p>
+            <a:pPr rtl="0"/>
+            <a:r>
+              <a:rPr lang="en-US" sz="1200" b="1" i="0" kern="1200" dirty="0">
+                <a:solidFill>
+                  <a:schemeClr val="tx1"/>
+                </a:solidFill>
+                <a:effectLst/>
+                <a:latin typeface="+mn-lt"/>
+                <a:ea typeface="+mn-ea"/>
+                <a:cs typeface="+mn-cs"/>
+              </a:rPr>
+              <a:t>4. </a:t>
+            </a:r>
+            <a:r>
+              <a:rPr lang="en-US" sz="1200" b="1" i="0" kern="1200" dirty="0" err="1">
+                <a:solidFill>
+                  <a:schemeClr val="tx1"/>
+                </a:solidFill>
+                <a:effectLst/>
+                <a:latin typeface="+mn-lt"/>
+                <a:ea typeface="+mn-ea"/>
+                <a:cs typeface="+mn-cs"/>
+              </a:rPr>
+              <a:t>Datenbereinigung</a:t>
+            </a:r>
+            <a:r>
+              <a:rPr lang="en-US" sz="1200" b="1" i="0" kern="1200" dirty="0">
+                <a:solidFill>
+                  <a:schemeClr val="tx1"/>
+                </a:solidFill>
+                <a:effectLst/>
+                <a:latin typeface="+mn-lt"/>
+                <a:ea typeface="+mn-ea"/>
+                <a:cs typeface="+mn-cs"/>
+              </a:rPr>
+              <a:t> &amp; -</a:t>
+            </a:r>
+            <a:r>
+              <a:rPr lang="en-US" sz="1200" b="1" i="0" kern="1200" dirty="0" err="1">
+                <a:solidFill>
+                  <a:schemeClr val="tx1"/>
+                </a:solidFill>
+                <a:effectLst/>
+                <a:latin typeface="+mn-lt"/>
+                <a:ea typeface="+mn-ea"/>
+                <a:cs typeface="+mn-cs"/>
+              </a:rPr>
+              <a:t>vorbereitung</a:t>
+            </a:r>
+            <a:endParaRPr lang="en-US" sz="1200" b="1" i="0" kern="1200" dirty="0">
+              <a:solidFill>
+                <a:schemeClr val="tx1"/>
+              </a:solidFill>
+              <a:effectLst/>
+              <a:latin typeface="+mn-lt"/>
+              <a:ea typeface="+mn-ea"/>
+              <a:cs typeface="+mn-cs"/>
+            </a:endParaRPr>
+          </a:p>
+          <a:p>
+            <a:pPr rtl="0"/>
+            <a:r>
+              <a:rPr lang="en-US" sz="1200" b="0" i="0" kern="1200" dirty="0">
+                <a:solidFill>
+                  <a:schemeClr val="tx1"/>
+                </a:solidFill>
+                <a:effectLst/>
+                <a:latin typeface="+mn-lt"/>
+                <a:ea typeface="+mn-ea"/>
+                <a:cs typeface="+mn-cs"/>
+              </a:rPr>
+              <a:t>"</a:t>
+            </a:r>
+            <a:r>
+              <a:rPr lang="en-US" sz="1200" b="0" i="0" kern="1200" dirty="0" err="1">
+                <a:solidFill>
+                  <a:schemeClr val="tx1"/>
+                </a:solidFill>
+                <a:effectLst/>
+                <a:latin typeface="+mn-lt"/>
+                <a:ea typeface="+mn-ea"/>
+                <a:cs typeface="+mn-cs"/>
+              </a:rPr>
+              <a:t>Rohdaten</a:t>
+            </a:r>
+            <a:r>
+              <a:rPr lang="en-US" sz="1200" b="0" i="0" kern="1200" dirty="0">
+                <a:solidFill>
+                  <a:schemeClr val="tx1"/>
+                </a:solidFill>
+                <a:effectLst/>
+                <a:latin typeface="+mn-lt"/>
+                <a:ea typeface="+mn-ea"/>
+                <a:cs typeface="+mn-cs"/>
+              </a:rPr>
+              <a:t> </a:t>
+            </a:r>
+            <a:r>
+              <a:rPr lang="en-US" sz="1200" b="0" i="0" kern="1200" dirty="0" err="1">
+                <a:solidFill>
+                  <a:schemeClr val="tx1"/>
+                </a:solidFill>
+                <a:effectLst/>
+                <a:latin typeface="+mn-lt"/>
+                <a:ea typeface="+mn-ea"/>
+                <a:cs typeface="+mn-cs"/>
+              </a:rPr>
+              <a:t>sind</a:t>
+            </a:r>
+            <a:r>
+              <a:rPr lang="en-US" sz="1200" b="0" i="0" kern="1200" dirty="0">
+                <a:solidFill>
+                  <a:schemeClr val="tx1"/>
+                </a:solidFill>
+                <a:effectLst/>
+                <a:latin typeface="+mn-lt"/>
+                <a:ea typeface="+mn-ea"/>
+                <a:cs typeface="+mn-cs"/>
+              </a:rPr>
+              <a:t> oft '</a:t>
+            </a:r>
+            <a:r>
+              <a:rPr lang="en-US" sz="1200" b="0" i="0" kern="1200" dirty="0" err="1">
+                <a:solidFill>
+                  <a:schemeClr val="tx1"/>
+                </a:solidFill>
+                <a:effectLst/>
+                <a:latin typeface="+mn-lt"/>
+                <a:ea typeface="+mn-ea"/>
+                <a:cs typeface="+mn-cs"/>
+              </a:rPr>
+              <a:t>schmutzig</a:t>
+            </a:r>
+            <a:r>
+              <a:rPr lang="en-US" sz="1200" b="0" i="0" kern="1200" dirty="0">
+                <a:solidFill>
+                  <a:schemeClr val="tx1"/>
+                </a:solidFill>
+                <a:effectLst/>
+                <a:latin typeface="+mn-lt"/>
+                <a:ea typeface="+mn-ea"/>
+                <a:cs typeface="+mn-cs"/>
+              </a:rPr>
+              <a:t>'. Wir </a:t>
+            </a:r>
+            <a:r>
+              <a:rPr lang="en-US" sz="1200" b="0" i="0" kern="1200" dirty="0" err="1">
+                <a:solidFill>
+                  <a:schemeClr val="tx1"/>
+                </a:solidFill>
+                <a:effectLst/>
+                <a:latin typeface="+mn-lt"/>
+                <a:ea typeface="+mn-ea"/>
+                <a:cs typeface="+mn-cs"/>
+              </a:rPr>
+              <a:t>korrigieren</a:t>
+            </a:r>
+            <a:r>
+              <a:rPr lang="en-US" sz="1200" b="0" i="0" kern="1200" dirty="0">
+                <a:solidFill>
+                  <a:schemeClr val="tx1"/>
+                </a:solidFill>
+                <a:effectLst/>
+                <a:latin typeface="+mn-lt"/>
+                <a:ea typeface="+mn-ea"/>
+                <a:cs typeface="+mn-cs"/>
+              </a:rPr>
+              <a:t> </a:t>
+            </a:r>
+            <a:r>
+              <a:rPr lang="en-US" sz="1200" b="0" i="0" kern="1200" dirty="0" err="1">
+                <a:solidFill>
+                  <a:schemeClr val="tx1"/>
+                </a:solidFill>
+                <a:effectLst/>
+                <a:latin typeface="+mn-lt"/>
+                <a:ea typeface="+mn-ea"/>
+                <a:cs typeface="+mn-cs"/>
+              </a:rPr>
+              <a:t>falsche</a:t>
+            </a:r>
+            <a:r>
+              <a:rPr lang="en-US" sz="1200" b="0" i="0" kern="1200" dirty="0">
+                <a:solidFill>
+                  <a:schemeClr val="tx1"/>
+                </a:solidFill>
+                <a:effectLst/>
+                <a:latin typeface="+mn-lt"/>
+                <a:ea typeface="+mn-ea"/>
+                <a:cs typeface="+mn-cs"/>
+              </a:rPr>
+              <a:t> </a:t>
+            </a:r>
+            <a:r>
+              <a:rPr lang="en-US" sz="1200" b="0" i="0" kern="1200" dirty="0" err="1">
+                <a:solidFill>
+                  <a:schemeClr val="tx1"/>
+                </a:solidFill>
+                <a:effectLst/>
+                <a:latin typeface="+mn-lt"/>
+                <a:ea typeface="+mn-ea"/>
+                <a:cs typeface="+mn-cs"/>
+              </a:rPr>
+              <a:t>Werte</a:t>
+            </a:r>
+            <a:r>
+              <a:rPr lang="en-US" sz="1200" b="0" i="0" kern="1200" dirty="0">
+                <a:solidFill>
+                  <a:schemeClr val="tx1"/>
+                </a:solidFill>
+                <a:effectLst/>
+                <a:latin typeface="+mn-lt"/>
+                <a:ea typeface="+mn-ea"/>
+                <a:cs typeface="+mn-cs"/>
+              </a:rPr>
+              <a:t> und </a:t>
+            </a:r>
+            <a:r>
+              <a:rPr lang="en-US" sz="1200" b="0" i="0" kern="1200" dirty="0" err="1">
+                <a:solidFill>
+                  <a:schemeClr val="tx1"/>
+                </a:solidFill>
+                <a:effectLst/>
+                <a:latin typeface="+mn-lt"/>
+                <a:ea typeface="+mn-ea"/>
+                <a:cs typeface="+mn-cs"/>
+              </a:rPr>
+              <a:t>transformieren</a:t>
+            </a:r>
+            <a:r>
+              <a:rPr lang="en-US" sz="1200" b="0" i="0" kern="1200" dirty="0">
+                <a:solidFill>
+                  <a:schemeClr val="tx1"/>
+                </a:solidFill>
+                <a:effectLst/>
+                <a:latin typeface="+mn-lt"/>
+                <a:ea typeface="+mn-ea"/>
+                <a:cs typeface="+mn-cs"/>
+              </a:rPr>
+              <a:t> </a:t>
+            </a:r>
+            <a:r>
+              <a:rPr lang="en-US" sz="1200" b="0" i="0" kern="1200" dirty="0" err="1">
+                <a:solidFill>
+                  <a:schemeClr val="tx1"/>
+                </a:solidFill>
+                <a:effectLst/>
+                <a:latin typeface="+mn-lt"/>
+                <a:ea typeface="+mn-ea"/>
+                <a:cs typeface="+mn-cs"/>
+              </a:rPr>
+              <a:t>Variablen</a:t>
+            </a:r>
+            <a:r>
+              <a:rPr lang="en-US" sz="1200" b="0" i="0" kern="1200" dirty="0">
+                <a:solidFill>
+                  <a:schemeClr val="tx1"/>
+                </a:solidFill>
+                <a:effectLst/>
+                <a:latin typeface="+mn-lt"/>
+                <a:ea typeface="+mn-ea"/>
+                <a:cs typeface="+mn-cs"/>
+              </a:rPr>
+              <a:t>, </a:t>
+            </a:r>
+            <a:r>
+              <a:rPr lang="en-US" sz="1200" b="0" i="0" kern="1200" dirty="0" err="1">
+                <a:solidFill>
+                  <a:schemeClr val="tx1"/>
+                </a:solidFill>
+                <a:effectLst/>
+                <a:latin typeface="+mn-lt"/>
+                <a:ea typeface="+mn-ea"/>
+                <a:cs typeface="+mn-cs"/>
+              </a:rPr>
+              <a:t>damit</a:t>
+            </a:r>
+            <a:r>
+              <a:rPr lang="en-US" sz="1200" b="0" i="0" kern="1200" dirty="0">
+                <a:solidFill>
+                  <a:schemeClr val="tx1"/>
+                </a:solidFill>
+                <a:effectLst/>
+                <a:latin typeface="+mn-lt"/>
+                <a:ea typeface="+mn-ea"/>
+                <a:cs typeface="+mn-cs"/>
+              </a:rPr>
+              <a:t> </a:t>
+            </a:r>
+            <a:r>
+              <a:rPr lang="en-US" sz="1200" b="0" i="0" kern="1200" dirty="0" err="1">
+                <a:solidFill>
+                  <a:schemeClr val="tx1"/>
+                </a:solidFill>
+                <a:effectLst/>
+                <a:latin typeface="+mn-lt"/>
+                <a:ea typeface="+mn-ea"/>
+                <a:cs typeface="+mn-cs"/>
+              </a:rPr>
+              <a:t>wir</a:t>
+            </a:r>
+            <a:r>
+              <a:rPr lang="en-US" sz="1200" b="0" i="0" kern="1200" dirty="0">
+                <a:solidFill>
+                  <a:schemeClr val="tx1"/>
+                </a:solidFill>
+                <a:effectLst/>
+                <a:latin typeface="+mn-lt"/>
+                <a:ea typeface="+mn-ea"/>
+                <a:cs typeface="+mn-cs"/>
+              </a:rPr>
+              <a:t> </a:t>
+            </a:r>
+            <a:r>
+              <a:rPr lang="en-US" sz="1200" b="0" i="0" kern="1200" dirty="0" err="1">
+                <a:solidFill>
+                  <a:schemeClr val="tx1"/>
+                </a:solidFill>
+                <a:effectLst/>
+                <a:latin typeface="+mn-lt"/>
+                <a:ea typeface="+mn-ea"/>
+                <a:cs typeface="+mn-cs"/>
+              </a:rPr>
+              <a:t>sie</a:t>
+            </a:r>
+            <a:r>
+              <a:rPr lang="en-US" sz="1200" b="0" i="0" kern="1200" dirty="0">
+                <a:solidFill>
+                  <a:schemeClr val="tx1"/>
+                </a:solidFill>
+                <a:effectLst/>
+                <a:latin typeface="+mn-lt"/>
+                <a:ea typeface="+mn-ea"/>
+                <a:cs typeface="+mn-cs"/>
+              </a:rPr>
+              <a:t> </a:t>
+            </a:r>
+            <a:r>
+              <a:rPr lang="en-US" sz="1200" b="0" i="0" kern="1200" dirty="0" err="1">
+                <a:solidFill>
+                  <a:schemeClr val="tx1"/>
+                </a:solidFill>
+                <a:effectLst/>
+                <a:latin typeface="+mn-lt"/>
+                <a:ea typeface="+mn-ea"/>
+                <a:cs typeface="+mn-cs"/>
+              </a:rPr>
+              <a:t>analysieren</a:t>
+            </a:r>
+            <a:r>
+              <a:rPr lang="en-US" sz="1200" b="0" i="0" kern="1200" dirty="0">
+                <a:solidFill>
+                  <a:schemeClr val="tx1"/>
+                </a:solidFill>
+                <a:effectLst/>
+                <a:latin typeface="+mn-lt"/>
+                <a:ea typeface="+mn-ea"/>
+                <a:cs typeface="+mn-cs"/>
+              </a:rPr>
+              <a:t> </a:t>
+            </a:r>
+            <a:r>
+              <a:rPr lang="en-US" sz="1200" b="0" i="0" kern="1200" dirty="0" err="1">
+                <a:solidFill>
+                  <a:schemeClr val="tx1"/>
+                </a:solidFill>
+                <a:effectLst/>
+                <a:latin typeface="+mn-lt"/>
+                <a:ea typeface="+mn-ea"/>
+                <a:cs typeface="+mn-cs"/>
+              </a:rPr>
+              <a:t>können</a:t>
+            </a:r>
+            <a:r>
+              <a:rPr lang="en-US" sz="1200" b="0" i="0" kern="1200" dirty="0">
+                <a:solidFill>
+                  <a:schemeClr val="tx1"/>
+                </a:solidFill>
+                <a:effectLst/>
+                <a:latin typeface="+mn-lt"/>
+                <a:ea typeface="+mn-ea"/>
+                <a:cs typeface="+mn-cs"/>
+              </a:rPr>
+              <a:t>."</a:t>
+            </a:r>
+          </a:p>
+          <a:p>
+            <a:pPr rtl="0"/>
+            <a:r>
+              <a:rPr lang="en-US" sz="1200" b="1" i="0" kern="1200" dirty="0">
+                <a:solidFill>
+                  <a:schemeClr val="tx1"/>
+                </a:solidFill>
+                <a:effectLst/>
+                <a:latin typeface="+mn-lt"/>
+                <a:ea typeface="+mn-ea"/>
+                <a:cs typeface="+mn-cs"/>
+              </a:rPr>
+              <a:t>Key words:</a:t>
+            </a:r>
+            <a:r>
+              <a:rPr lang="en-US" sz="1200" b="0" i="0" kern="1200" dirty="0">
+                <a:solidFill>
+                  <a:schemeClr val="tx1"/>
+                </a:solidFill>
+                <a:effectLst/>
+                <a:latin typeface="+mn-lt"/>
+                <a:ea typeface="+mn-ea"/>
+                <a:cs typeface="+mn-cs"/>
+              </a:rPr>
+              <a:t> </a:t>
+            </a:r>
+            <a:r>
+              <a:rPr lang="en-US" sz="1200" b="0" i="1" kern="1200" dirty="0">
+                <a:solidFill>
+                  <a:schemeClr val="tx1"/>
+                </a:solidFill>
+                <a:effectLst/>
+                <a:latin typeface="+mn-lt"/>
+                <a:ea typeface="+mn-ea"/>
+                <a:cs typeface="+mn-cs"/>
+              </a:rPr>
+              <a:t>Format </a:t>
+            </a:r>
+            <a:r>
+              <a:rPr lang="en-US" sz="1200" b="0" i="1" kern="1200" dirty="0" err="1">
+                <a:solidFill>
+                  <a:schemeClr val="tx1"/>
+                </a:solidFill>
+                <a:effectLst/>
+                <a:latin typeface="+mn-lt"/>
+                <a:ea typeface="+mn-ea"/>
+                <a:cs typeface="+mn-cs"/>
+              </a:rPr>
+              <a:t>prüfen</a:t>
+            </a:r>
+            <a:r>
+              <a:rPr lang="en-US" sz="1200" b="0" i="0" kern="1200" dirty="0">
+                <a:solidFill>
+                  <a:schemeClr val="tx1"/>
+                </a:solidFill>
+                <a:effectLst/>
+                <a:latin typeface="+mn-lt"/>
+                <a:ea typeface="+mn-ea"/>
+                <a:cs typeface="+mn-cs"/>
+              </a:rPr>
+              <a:t> (check format), </a:t>
+            </a:r>
+            <a:r>
+              <a:rPr lang="en-US" sz="1200" b="0" i="1" kern="1200" dirty="0" err="1">
+                <a:solidFill>
+                  <a:schemeClr val="tx1"/>
+                </a:solidFill>
+                <a:effectLst/>
+                <a:latin typeface="+mn-lt"/>
+                <a:ea typeface="+mn-ea"/>
+                <a:cs typeface="+mn-cs"/>
+              </a:rPr>
+              <a:t>standardisieren</a:t>
+            </a:r>
+            <a:r>
+              <a:rPr lang="en-US" sz="1200" b="0" i="0" kern="1200" dirty="0">
+                <a:solidFill>
+                  <a:schemeClr val="tx1"/>
+                </a:solidFill>
+                <a:effectLst/>
+                <a:latin typeface="+mn-lt"/>
+                <a:ea typeface="+mn-ea"/>
+                <a:cs typeface="+mn-cs"/>
+              </a:rPr>
+              <a:t> (standardize).</a:t>
+            </a:r>
+          </a:p>
+          <a:p>
+            <a:pPr rtl="0"/>
+            <a:r>
+              <a:rPr lang="en-US" sz="1200" b="1" i="0" kern="1200" dirty="0">
+                <a:solidFill>
+                  <a:schemeClr val="tx1"/>
+                </a:solidFill>
+                <a:effectLst/>
+                <a:latin typeface="+mn-lt"/>
+                <a:ea typeface="+mn-ea"/>
+                <a:cs typeface="+mn-cs"/>
+              </a:rPr>
+              <a:t>5. </a:t>
+            </a:r>
+            <a:r>
+              <a:rPr lang="en-US" sz="1200" b="1" i="0" kern="1200" dirty="0" err="1">
+                <a:solidFill>
+                  <a:schemeClr val="tx1"/>
+                </a:solidFill>
+                <a:effectLst/>
+                <a:latin typeface="+mn-lt"/>
+                <a:ea typeface="+mn-ea"/>
+                <a:cs typeface="+mn-cs"/>
+              </a:rPr>
+              <a:t>Datenmodellierung</a:t>
+            </a:r>
+            <a:r>
+              <a:rPr lang="en-US" sz="1200" b="1" i="0" kern="1200" dirty="0">
+                <a:solidFill>
+                  <a:schemeClr val="tx1"/>
+                </a:solidFill>
+                <a:effectLst/>
+                <a:latin typeface="+mn-lt"/>
+                <a:ea typeface="+mn-ea"/>
+                <a:cs typeface="+mn-cs"/>
+              </a:rPr>
+              <a:t> &amp; Aggregation</a:t>
+            </a:r>
+          </a:p>
+          <a:p>
+            <a:pPr rtl="0"/>
+            <a:r>
+              <a:rPr lang="en-US" sz="1200" b="0" i="0" kern="1200" dirty="0">
+                <a:solidFill>
+                  <a:schemeClr val="tx1"/>
+                </a:solidFill>
+                <a:effectLst/>
+                <a:latin typeface="+mn-lt"/>
+                <a:ea typeface="+mn-ea"/>
+                <a:cs typeface="+mn-cs"/>
+              </a:rPr>
+              <a:t>"Wir </a:t>
+            </a:r>
+            <a:r>
+              <a:rPr lang="en-US" sz="1200" b="0" i="0" kern="1200" dirty="0" err="1">
+                <a:solidFill>
+                  <a:schemeClr val="tx1"/>
+                </a:solidFill>
+                <a:effectLst/>
+                <a:latin typeface="+mn-lt"/>
+                <a:ea typeface="+mn-ea"/>
+                <a:cs typeface="+mn-cs"/>
+              </a:rPr>
+              <a:t>organisieren</a:t>
+            </a:r>
+            <a:r>
+              <a:rPr lang="en-US" sz="1200" b="0" i="0" kern="1200" dirty="0">
+                <a:solidFill>
+                  <a:schemeClr val="tx1"/>
+                </a:solidFill>
+                <a:effectLst/>
+                <a:latin typeface="+mn-lt"/>
+                <a:ea typeface="+mn-ea"/>
+                <a:cs typeface="+mn-cs"/>
+              </a:rPr>
+              <a:t> Daten in </a:t>
+            </a:r>
+            <a:r>
+              <a:rPr lang="en-US" sz="1200" b="0" i="0" kern="1200" dirty="0" err="1">
+                <a:solidFill>
+                  <a:schemeClr val="tx1"/>
+                </a:solidFill>
+                <a:effectLst/>
+                <a:latin typeface="+mn-lt"/>
+                <a:ea typeface="+mn-ea"/>
+                <a:cs typeface="+mn-cs"/>
+              </a:rPr>
+              <a:t>Tabellen</a:t>
+            </a:r>
+            <a:r>
+              <a:rPr lang="en-US" sz="1200" b="0" i="0" kern="1200" dirty="0">
+                <a:solidFill>
+                  <a:schemeClr val="tx1"/>
+                </a:solidFill>
+                <a:effectLst/>
+                <a:latin typeface="+mn-lt"/>
+                <a:ea typeface="+mn-ea"/>
+                <a:cs typeface="+mn-cs"/>
+              </a:rPr>
+              <a:t> und </a:t>
+            </a:r>
+            <a:r>
+              <a:rPr lang="en-US" sz="1200" b="0" i="0" kern="1200" dirty="0" err="1">
+                <a:solidFill>
+                  <a:schemeClr val="tx1"/>
+                </a:solidFill>
+                <a:effectLst/>
+                <a:latin typeface="+mn-lt"/>
+                <a:ea typeface="+mn-ea"/>
+                <a:cs typeface="+mn-cs"/>
+              </a:rPr>
+              <a:t>nutzen</a:t>
+            </a:r>
+            <a:r>
+              <a:rPr lang="en-US" sz="1200" b="0" i="0" kern="1200" dirty="0">
+                <a:solidFill>
+                  <a:schemeClr val="tx1"/>
+                </a:solidFill>
+                <a:effectLst/>
+                <a:latin typeface="+mn-lt"/>
+                <a:ea typeface="+mn-ea"/>
+                <a:cs typeface="+mn-cs"/>
+              </a:rPr>
+              <a:t> </a:t>
+            </a:r>
+            <a:r>
+              <a:rPr lang="en-US" sz="1200" b="1" i="0" kern="1200" dirty="0">
+                <a:solidFill>
+                  <a:schemeClr val="tx1"/>
+                </a:solidFill>
+                <a:effectLst/>
+                <a:latin typeface="+mn-lt"/>
+                <a:ea typeface="+mn-ea"/>
+                <a:cs typeface="+mn-cs"/>
+              </a:rPr>
+              <a:t>Feature Engineering</a:t>
+            </a:r>
+            <a:r>
+              <a:rPr lang="en-US" sz="1200" b="0" i="0" kern="1200" dirty="0">
+                <a:solidFill>
+                  <a:schemeClr val="tx1"/>
+                </a:solidFill>
+                <a:effectLst/>
+                <a:latin typeface="+mn-lt"/>
+                <a:ea typeface="+mn-ea"/>
+                <a:cs typeface="+mn-cs"/>
+              </a:rPr>
+              <a:t>, um </a:t>
+            </a:r>
+            <a:r>
+              <a:rPr lang="en-US" sz="1200" b="0" i="0" kern="1200" dirty="0" err="1">
+                <a:solidFill>
+                  <a:schemeClr val="tx1"/>
+                </a:solidFill>
+                <a:effectLst/>
+                <a:latin typeface="+mn-lt"/>
+                <a:ea typeface="+mn-ea"/>
+                <a:cs typeface="+mn-cs"/>
+              </a:rPr>
+              <a:t>neue</a:t>
+            </a:r>
+            <a:r>
+              <a:rPr lang="en-US" sz="1200" b="0" i="0" kern="1200" dirty="0">
+                <a:solidFill>
+                  <a:schemeClr val="tx1"/>
+                </a:solidFill>
+                <a:effectLst/>
+                <a:latin typeface="+mn-lt"/>
+                <a:ea typeface="+mn-ea"/>
+                <a:cs typeface="+mn-cs"/>
+              </a:rPr>
+              <a:t> </a:t>
+            </a:r>
+            <a:r>
+              <a:rPr lang="en-US" sz="1200" b="0" i="0" kern="1200" dirty="0" err="1">
+                <a:solidFill>
+                  <a:schemeClr val="tx1"/>
+                </a:solidFill>
+                <a:effectLst/>
+                <a:latin typeface="+mn-lt"/>
+                <a:ea typeface="+mn-ea"/>
+                <a:cs typeface="+mn-cs"/>
+              </a:rPr>
+              <a:t>Erkenntnisse</a:t>
+            </a:r>
+            <a:r>
+              <a:rPr lang="en-US" sz="1200" b="0" i="0" kern="1200" dirty="0">
+                <a:solidFill>
+                  <a:schemeClr val="tx1"/>
+                </a:solidFill>
+                <a:effectLst/>
+                <a:latin typeface="+mn-lt"/>
+                <a:ea typeface="+mn-ea"/>
+                <a:cs typeface="+mn-cs"/>
+              </a:rPr>
+              <a:t> </a:t>
+            </a:r>
+            <a:r>
+              <a:rPr lang="en-US" sz="1200" b="0" i="0" kern="1200" dirty="0" err="1">
+                <a:solidFill>
+                  <a:schemeClr val="tx1"/>
+                </a:solidFill>
+                <a:effectLst/>
+                <a:latin typeface="+mn-lt"/>
+                <a:ea typeface="+mn-ea"/>
+                <a:cs typeface="+mn-cs"/>
+              </a:rPr>
+              <a:t>aus</a:t>
+            </a:r>
+            <a:r>
+              <a:rPr lang="en-US" sz="1200" b="0" i="0" kern="1200" dirty="0">
+                <a:solidFill>
+                  <a:schemeClr val="tx1"/>
+                </a:solidFill>
+                <a:effectLst/>
+                <a:latin typeface="+mn-lt"/>
+                <a:ea typeface="+mn-ea"/>
+                <a:cs typeface="+mn-cs"/>
+              </a:rPr>
+              <a:t> den </a:t>
+            </a:r>
+            <a:r>
+              <a:rPr lang="en-US" sz="1200" b="0" i="0" kern="1200" dirty="0" err="1">
+                <a:solidFill>
+                  <a:schemeClr val="tx1"/>
+                </a:solidFill>
+                <a:effectLst/>
+                <a:latin typeface="+mn-lt"/>
+                <a:ea typeface="+mn-ea"/>
+                <a:cs typeface="+mn-cs"/>
+              </a:rPr>
+              <a:t>Aggregationen</a:t>
+            </a:r>
+            <a:r>
+              <a:rPr lang="en-US" sz="1200" b="0" i="0" kern="1200" dirty="0">
+                <a:solidFill>
+                  <a:schemeClr val="tx1"/>
+                </a:solidFill>
+                <a:effectLst/>
+                <a:latin typeface="+mn-lt"/>
+                <a:ea typeface="+mn-ea"/>
+                <a:cs typeface="+mn-cs"/>
+              </a:rPr>
+              <a:t> </a:t>
+            </a:r>
+            <a:r>
+              <a:rPr lang="en-US" sz="1200" b="0" i="0" kern="1200" dirty="0" err="1">
+                <a:solidFill>
+                  <a:schemeClr val="tx1"/>
+                </a:solidFill>
+                <a:effectLst/>
+                <a:latin typeface="+mn-lt"/>
+                <a:ea typeface="+mn-ea"/>
+                <a:cs typeface="+mn-cs"/>
+              </a:rPr>
+              <a:t>zu</a:t>
+            </a:r>
+            <a:r>
+              <a:rPr lang="en-US" sz="1200" b="0" i="0" kern="1200" dirty="0">
+                <a:solidFill>
+                  <a:schemeClr val="tx1"/>
+                </a:solidFill>
+                <a:effectLst/>
+                <a:latin typeface="+mn-lt"/>
+                <a:ea typeface="+mn-ea"/>
+                <a:cs typeface="+mn-cs"/>
+              </a:rPr>
+              <a:t> </a:t>
+            </a:r>
+            <a:r>
+              <a:rPr lang="en-US" sz="1200" b="0" i="0" kern="1200" dirty="0" err="1">
+                <a:solidFill>
+                  <a:schemeClr val="tx1"/>
+                </a:solidFill>
+                <a:effectLst/>
+                <a:latin typeface="+mn-lt"/>
+                <a:ea typeface="+mn-ea"/>
+                <a:cs typeface="+mn-cs"/>
+              </a:rPr>
+              <a:t>gewinnen</a:t>
+            </a:r>
+            <a:r>
+              <a:rPr lang="en-US" sz="1200" b="0" i="0" kern="1200" dirty="0">
+                <a:solidFill>
+                  <a:schemeClr val="tx1"/>
+                </a:solidFill>
+                <a:effectLst/>
+                <a:latin typeface="+mn-lt"/>
+                <a:ea typeface="+mn-ea"/>
+                <a:cs typeface="+mn-cs"/>
+              </a:rPr>
+              <a:t>."</a:t>
+            </a:r>
+          </a:p>
+          <a:p>
+            <a:pPr rtl="0"/>
+            <a:r>
+              <a:rPr lang="en-US" sz="1200" b="1" i="0" kern="1200" dirty="0">
+                <a:solidFill>
+                  <a:schemeClr val="tx1"/>
+                </a:solidFill>
+                <a:effectLst/>
+                <a:latin typeface="+mn-lt"/>
+                <a:ea typeface="+mn-ea"/>
+                <a:cs typeface="+mn-cs"/>
+              </a:rPr>
+              <a:t>Key words:</a:t>
+            </a:r>
+            <a:r>
+              <a:rPr lang="en-US" sz="1200" b="0" i="0" kern="1200" dirty="0">
+                <a:solidFill>
+                  <a:schemeClr val="tx1"/>
+                </a:solidFill>
+                <a:effectLst/>
+                <a:latin typeface="+mn-lt"/>
+                <a:ea typeface="+mn-ea"/>
+                <a:cs typeface="+mn-cs"/>
+              </a:rPr>
+              <a:t> </a:t>
+            </a:r>
+            <a:r>
+              <a:rPr lang="en-US" sz="1200" b="0" i="1" kern="1200" dirty="0" err="1">
+                <a:solidFill>
+                  <a:schemeClr val="tx1"/>
+                </a:solidFill>
+                <a:effectLst/>
+                <a:latin typeface="+mn-lt"/>
+                <a:ea typeface="+mn-ea"/>
+                <a:cs typeface="+mn-cs"/>
+              </a:rPr>
+              <a:t>Beziehungen</a:t>
+            </a:r>
+            <a:r>
+              <a:rPr lang="en-US" sz="1200" b="0" i="1" kern="1200" dirty="0">
+                <a:solidFill>
+                  <a:schemeClr val="tx1"/>
+                </a:solidFill>
+                <a:effectLst/>
+                <a:latin typeface="+mn-lt"/>
+                <a:ea typeface="+mn-ea"/>
+                <a:cs typeface="+mn-cs"/>
+              </a:rPr>
+              <a:t> </a:t>
+            </a:r>
+            <a:r>
+              <a:rPr lang="en-US" sz="1200" b="0" i="1" kern="1200" dirty="0" err="1">
+                <a:solidFill>
+                  <a:schemeClr val="tx1"/>
+                </a:solidFill>
+                <a:effectLst/>
+                <a:latin typeface="+mn-lt"/>
+                <a:ea typeface="+mn-ea"/>
+                <a:cs typeface="+mn-cs"/>
+              </a:rPr>
+              <a:t>organisieren</a:t>
+            </a:r>
+            <a:r>
+              <a:rPr lang="en-US" sz="1200" b="0" i="0" kern="1200" dirty="0">
+                <a:solidFill>
+                  <a:schemeClr val="tx1"/>
+                </a:solidFill>
+                <a:effectLst/>
+                <a:latin typeface="+mn-lt"/>
+                <a:ea typeface="+mn-ea"/>
+                <a:cs typeface="+mn-cs"/>
+              </a:rPr>
+              <a:t> (organize relationships).</a:t>
+            </a:r>
+          </a:p>
+          <a:p>
+            <a:pPr rtl="0"/>
+            <a:r>
+              <a:rPr lang="en-US" sz="1200" b="1" i="0" kern="1200" dirty="0">
+                <a:solidFill>
+                  <a:schemeClr val="tx1"/>
+                </a:solidFill>
+                <a:effectLst/>
+                <a:latin typeface="+mn-lt"/>
+                <a:ea typeface="+mn-ea"/>
+                <a:cs typeface="+mn-cs"/>
+              </a:rPr>
+              <a:t>6. </a:t>
+            </a:r>
+            <a:r>
+              <a:rPr lang="en-US" sz="1200" b="1" i="0" kern="1200" dirty="0" err="1">
+                <a:solidFill>
+                  <a:schemeClr val="tx1"/>
+                </a:solidFill>
+                <a:effectLst/>
+                <a:latin typeface="+mn-lt"/>
+                <a:ea typeface="+mn-ea"/>
+                <a:cs typeface="+mn-cs"/>
+              </a:rPr>
+              <a:t>Deskriptive</a:t>
+            </a:r>
+            <a:r>
+              <a:rPr lang="en-US" sz="1200" b="1" i="0" kern="1200" dirty="0">
+                <a:solidFill>
+                  <a:schemeClr val="tx1"/>
+                </a:solidFill>
+                <a:effectLst/>
+                <a:latin typeface="+mn-lt"/>
+                <a:ea typeface="+mn-ea"/>
+                <a:cs typeface="+mn-cs"/>
+              </a:rPr>
+              <a:t> </a:t>
+            </a:r>
+            <a:r>
+              <a:rPr lang="en-US" sz="1200" b="1" i="0" kern="1200" dirty="0" err="1">
+                <a:solidFill>
+                  <a:schemeClr val="tx1"/>
+                </a:solidFill>
+                <a:effectLst/>
+                <a:latin typeface="+mn-lt"/>
+                <a:ea typeface="+mn-ea"/>
+                <a:cs typeface="+mn-cs"/>
+              </a:rPr>
+              <a:t>Statistik</a:t>
+            </a:r>
+            <a:r>
+              <a:rPr lang="en-US" sz="1200" b="1" i="0" kern="1200" dirty="0">
+                <a:solidFill>
+                  <a:schemeClr val="tx1"/>
+                </a:solidFill>
+                <a:effectLst/>
+                <a:latin typeface="+mn-lt"/>
+                <a:ea typeface="+mn-ea"/>
+                <a:cs typeface="+mn-cs"/>
+              </a:rPr>
+              <a:t> &amp; KPIs</a:t>
+            </a:r>
+          </a:p>
+          <a:p>
+            <a:pPr rtl="0"/>
+            <a:r>
+              <a:rPr lang="en-US" sz="1200" b="0" i="0" kern="1200" dirty="0">
+                <a:solidFill>
+                  <a:schemeClr val="tx1"/>
+                </a:solidFill>
+                <a:effectLst/>
+                <a:latin typeface="+mn-lt"/>
+                <a:ea typeface="+mn-ea"/>
+                <a:cs typeface="+mn-cs"/>
+              </a:rPr>
+              <a:t>"Hier </a:t>
+            </a:r>
+            <a:r>
+              <a:rPr lang="en-US" sz="1200" b="0" i="0" kern="1200" dirty="0" err="1">
+                <a:solidFill>
+                  <a:schemeClr val="tx1"/>
+                </a:solidFill>
+                <a:effectLst/>
+                <a:latin typeface="+mn-lt"/>
+                <a:ea typeface="+mn-ea"/>
+                <a:cs typeface="+mn-cs"/>
+              </a:rPr>
+              <a:t>lernen</a:t>
+            </a:r>
+            <a:r>
+              <a:rPr lang="en-US" sz="1200" b="0" i="0" kern="1200" dirty="0">
+                <a:solidFill>
+                  <a:schemeClr val="tx1"/>
+                </a:solidFill>
+                <a:effectLst/>
+                <a:latin typeface="+mn-lt"/>
+                <a:ea typeface="+mn-ea"/>
+                <a:cs typeface="+mn-cs"/>
+              </a:rPr>
+              <a:t> </a:t>
+            </a:r>
+            <a:r>
+              <a:rPr lang="en-US" sz="1200" b="0" i="0" kern="1200" dirty="0" err="1">
+                <a:solidFill>
+                  <a:schemeClr val="tx1"/>
+                </a:solidFill>
+                <a:effectLst/>
+                <a:latin typeface="+mn-lt"/>
+                <a:ea typeface="+mn-ea"/>
+                <a:cs typeface="+mn-cs"/>
+              </a:rPr>
+              <a:t>wir</a:t>
+            </a:r>
+            <a:r>
+              <a:rPr lang="en-US" sz="1200" b="0" i="0" kern="1200" dirty="0">
+                <a:solidFill>
+                  <a:schemeClr val="tx1"/>
+                </a:solidFill>
+                <a:effectLst/>
+                <a:latin typeface="+mn-lt"/>
+                <a:ea typeface="+mn-ea"/>
+                <a:cs typeface="+mn-cs"/>
+              </a:rPr>
+              <a:t> die </a:t>
+            </a:r>
+            <a:r>
+              <a:rPr lang="en-US" sz="1200" b="0" i="0" kern="1200" dirty="0" err="1">
+                <a:solidFill>
+                  <a:schemeClr val="tx1"/>
+                </a:solidFill>
+                <a:effectLst/>
+                <a:latin typeface="+mn-lt"/>
+                <a:ea typeface="+mn-ea"/>
+                <a:cs typeface="+mn-cs"/>
+              </a:rPr>
+              <a:t>Sprache</a:t>
+            </a:r>
+            <a:r>
+              <a:rPr lang="en-US" sz="1200" b="0" i="0" kern="1200" dirty="0">
+                <a:solidFill>
+                  <a:schemeClr val="tx1"/>
+                </a:solidFill>
+                <a:effectLst/>
+                <a:latin typeface="+mn-lt"/>
+                <a:ea typeface="+mn-ea"/>
+                <a:cs typeface="+mn-cs"/>
+              </a:rPr>
+              <a:t> der Daten: </a:t>
+            </a:r>
+            <a:r>
+              <a:rPr lang="en-US" sz="1200" b="1" i="0" kern="1200" dirty="0" err="1">
+                <a:solidFill>
+                  <a:schemeClr val="tx1"/>
+                </a:solidFill>
+                <a:effectLst/>
+                <a:latin typeface="+mn-lt"/>
+                <a:ea typeface="+mn-ea"/>
+                <a:cs typeface="+mn-cs"/>
+              </a:rPr>
+              <a:t>Mittelwert</a:t>
+            </a:r>
+            <a:r>
+              <a:rPr lang="en-US" sz="1200" b="0" i="0" kern="1200" dirty="0">
+                <a:solidFill>
+                  <a:schemeClr val="tx1"/>
+                </a:solidFill>
+                <a:effectLst/>
+                <a:latin typeface="+mn-lt"/>
+                <a:ea typeface="+mn-ea"/>
+                <a:cs typeface="+mn-cs"/>
+              </a:rPr>
+              <a:t>, </a:t>
+            </a:r>
+            <a:r>
+              <a:rPr lang="en-US" sz="1200" b="1" i="0" kern="1200" dirty="0">
+                <a:solidFill>
+                  <a:schemeClr val="tx1"/>
+                </a:solidFill>
+                <a:effectLst/>
+                <a:latin typeface="+mn-lt"/>
+                <a:ea typeface="+mn-ea"/>
+                <a:cs typeface="+mn-cs"/>
+              </a:rPr>
+              <a:t>Median</a:t>
+            </a:r>
+            <a:r>
+              <a:rPr lang="en-US" sz="1200" b="0" i="0" kern="1200" dirty="0">
+                <a:solidFill>
+                  <a:schemeClr val="tx1"/>
+                </a:solidFill>
+                <a:effectLst/>
+                <a:latin typeface="+mn-lt"/>
+                <a:ea typeface="+mn-ea"/>
+                <a:cs typeface="+mn-cs"/>
+              </a:rPr>
+              <a:t> und </a:t>
+            </a:r>
+            <a:r>
+              <a:rPr lang="en-US" sz="1200" b="1" i="0" kern="1200" dirty="0" err="1">
+                <a:solidFill>
+                  <a:schemeClr val="tx1"/>
+                </a:solidFill>
+                <a:effectLst/>
+                <a:latin typeface="+mn-lt"/>
+                <a:ea typeface="+mn-ea"/>
+                <a:cs typeface="+mn-cs"/>
+              </a:rPr>
+              <a:t>Standardabweichung</a:t>
+            </a:r>
+            <a:r>
+              <a:rPr lang="en-US" sz="1200" b="0" i="0" kern="1200" dirty="0">
+                <a:solidFill>
+                  <a:schemeClr val="tx1"/>
+                </a:solidFill>
+                <a:effectLst/>
+                <a:latin typeface="+mn-lt"/>
+                <a:ea typeface="+mn-ea"/>
+                <a:cs typeface="+mn-cs"/>
+              </a:rPr>
+              <a:t>. Wir </a:t>
+            </a:r>
+            <a:r>
+              <a:rPr lang="en-US" sz="1200" b="0" i="0" kern="1200" dirty="0" err="1">
+                <a:solidFill>
+                  <a:schemeClr val="tx1"/>
+                </a:solidFill>
+                <a:effectLst/>
+                <a:latin typeface="+mn-lt"/>
+                <a:ea typeface="+mn-ea"/>
+                <a:cs typeface="+mn-cs"/>
+              </a:rPr>
+              <a:t>suchen</a:t>
+            </a:r>
+            <a:r>
+              <a:rPr lang="en-US" sz="1200" b="0" i="0" kern="1200" dirty="0">
+                <a:solidFill>
+                  <a:schemeClr val="tx1"/>
+                </a:solidFill>
+                <a:effectLst/>
+                <a:latin typeface="+mn-lt"/>
+                <a:ea typeface="+mn-ea"/>
+                <a:cs typeface="+mn-cs"/>
+              </a:rPr>
+              <a:t> </a:t>
+            </a:r>
+            <a:r>
+              <a:rPr lang="en-US" sz="1200" b="0" i="0" kern="1200" dirty="0" err="1">
+                <a:solidFill>
+                  <a:schemeClr val="tx1"/>
+                </a:solidFill>
+                <a:effectLst/>
+                <a:latin typeface="+mn-lt"/>
+                <a:ea typeface="+mn-ea"/>
+                <a:cs typeface="+mn-cs"/>
+              </a:rPr>
+              <a:t>nach</a:t>
+            </a:r>
+            <a:r>
+              <a:rPr lang="en-US" sz="1200" b="0" i="0" kern="1200" dirty="0">
+                <a:solidFill>
+                  <a:schemeClr val="tx1"/>
+                </a:solidFill>
+                <a:effectLst/>
+                <a:latin typeface="+mn-lt"/>
+                <a:ea typeface="+mn-ea"/>
+                <a:cs typeface="+mn-cs"/>
+              </a:rPr>
+              <a:t> </a:t>
+            </a:r>
+            <a:r>
+              <a:rPr lang="en-US" sz="1200" b="0" i="0" kern="1200" dirty="0" err="1">
+                <a:solidFill>
+                  <a:schemeClr val="tx1"/>
+                </a:solidFill>
+                <a:effectLst/>
+                <a:latin typeface="+mn-lt"/>
+                <a:ea typeface="+mn-ea"/>
+                <a:cs typeface="+mn-cs"/>
+              </a:rPr>
+              <a:t>Korrelationen</a:t>
+            </a:r>
+            <a:r>
+              <a:rPr lang="en-US" sz="1200" b="0" i="0" kern="1200" dirty="0">
+                <a:solidFill>
+                  <a:schemeClr val="tx1"/>
+                </a:solidFill>
+                <a:effectLst/>
+                <a:latin typeface="+mn-lt"/>
+                <a:ea typeface="+mn-ea"/>
+                <a:cs typeface="+mn-cs"/>
+              </a:rPr>
+              <a:t>."</a:t>
+            </a:r>
+          </a:p>
+          <a:p>
+            <a:pPr rtl="0"/>
+            <a:r>
+              <a:rPr lang="en-US" sz="1200" b="1" i="0" kern="1200" dirty="0">
+                <a:solidFill>
+                  <a:schemeClr val="tx1"/>
+                </a:solidFill>
+                <a:effectLst/>
+                <a:latin typeface="+mn-lt"/>
+                <a:ea typeface="+mn-ea"/>
+                <a:cs typeface="+mn-cs"/>
+              </a:rPr>
+              <a:t>Key words:</a:t>
+            </a:r>
+            <a:r>
+              <a:rPr lang="en-US" sz="1200" b="0" i="0" kern="1200" dirty="0">
+                <a:solidFill>
+                  <a:schemeClr val="tx1"/>
+                </a:solidFill>
+                <a:effectLst/>
+                <a:latin typeface="+mn-lt"/>
+                <a:ea typeface="+mn-ea"/>
+                <a:cs typeface="+mn-cs"/>
+              </a:rPr>
+              <a:t> </a:t>
+            </a:r>
+            <a:r>
+              <a:rPr lang="en-US" sz="1200" b="0" i="1" kern="1200" dirty="0" err="1">
+                <a:solidFill>
+                  <a:schemeClr val="tx1"/>
+                </a:solidFill>
+                <a:effectLst/>
+                <a:latin typeface="+mn-lt"/>
+                <a:ea typeface="+mn-ea"/>
+                <a:cs typeface="+mn-cs"/>
+              </a:rPr>
+              <a:t>Spannweite</a:t>
+            </a:r>
+            <a:r>
+              <a:rPr lang="en-US" sz="1200" b="0" i="0" kern="1200" dirty="0">
+                <a:solidFill>
+                  <a:schemeClr val="tx1"/>
+                </a:solidFill>
+                <a:effectLst/>
+                <a:latin typeface="+mn-lt"/>
+                <a:ea typeface="+mn-ea"/>
+                <a:cs typeface="+mn-cs"/>
+              </a:rPr>
+              <a:t> (range), </a:t>
+            </a:r>
+            <a:r>
+              <a:rPr lang="en-US" sz="1200" b="0" i="1" kern="1200" dirty="0" err="1">
+                <a:solidFill>
+                  <a:schemeClr val="tx1"/>
+                </a:solidFill>
+                <a:effectLst/>
+                <a:latin typeface="+mn-lt"/>
+                <a:ea typeface="+mn-ea"/>
+                <a:cs typeface="+mn-cs"/>
+              </a:rPr>
+              <a:t>Kreuztabellen</a:t>
+            </a:r>
+            <a:r>
+              <a:rPr lang="en-US" sz="1200" b="0" i="0" kern="1200" dirty="0">
+                <a:solidFill>
+                  <a:schemeClr val="tx1"/>
+                </a:solidFill>
+                <a:effectLst/>
+                <a:latin typeface="+mn-lt"/>
+                <a:ea typeface="+mn-ea"/>
+                <a:cs typeface="+mn-cs"/>
+              </a:rPr>
+              <a:t> (cross-tabulations).</a:t>
+            </a:r>
+          </a:p>
+          <a:p>
+            <a:pPr rtl="0"/>
+            <a:r>
+              <a:rPr lang="en-US" sz="1200" b="1" i="0" kern="1200" dirty="0">
+                <a:solidFill>
+                  <a:schemeClr val="tx1"/>
+                </a:solidFill>
+                <a:effectLst/>
+                <a:latin typeface="+mn-lt"/>
+                <a:ea typeface="+mn-ea"/>
+                <a:cs typeface="+mn-cs"/>
+              </a:rPr>
+              <a:t>7. </a:t>
+            </a:r>
+            <a:r>
+              <a:rPr lang="en-US" sz="1200" b="1" i="0" kern="1200" dirty="0" err="1">
+                <a:solidFill>
+                  <a:schemeClr val="tx1"/>
+                </a:solidFill>
+                <a:effectLst/>
+                <a:latin typeface="+mn-lt"/>
+                <a:ea typeface="+mn-ea"/>
+                <a:cs typeface="+mn-cs"/>
+              </a:rPr>
+              <a:t>Datenvisualisierung</a:t>
+            </a:r>
+            <a:endParaRPr lang="en-US" sz="1200" b="1" i="0" kern="1200" dirty="0">
+              <a:solidFill>
+                <a:schemeClr val="tx1"/>
+              </a:solidFill>
+              <a:effectLst/>
+              <a:latin typeface="+mn-lt"/>
+              <a:ea typeface="+mn-ea"/>
+              <a:cs typeface="+mn-cs"/>
+            </a:endParaRPr>
+          </a:p>
+          <a:p>
+            <a:pPr rtl="0"/>
+            <a:r>
+              <a:rPr lang="en-US" sz="1200" b="0" i="0" kern="1200" dirty="0">
+                <a:solidFill>
+                  <a:schemeClr val="tx1"/>
+                </a:solidFill>
+                <a:effectLst/>
+                <a:latin typeface="+mn-lt"/>
+                <a:ea typeface="+mn-ea"/>
+                <a:cs typeface="+mn-cs"/>
+              </a:rPr>
+              <a:t>"Ein Bild </a:t>
+            </a:r>
+            <a:r>
+              <a:rPr lang="en-US" sz="1200" b="0" i="0" kern="1200" dirty="0" err="1">
+                <a:solidFill>
+                  <a:schemeClr val="tx1"/>
+                </a:solidFill>
+                <a:effectLst/>
+                <a:latin typeface="+mn-lt"/>
+                <a:ea typeface="+mn-ea"/>
+                <a:cs typeface="+mn-cs"/>
+              </a:rPr>
+              <a:t>sagt</a:t>
+            </a:r>
+            <a:r>
+              <a:rPr lang="en-US" sz="1200" b="0" i="0" kern="1200" dirty="0">
+                <a:solidFill>
+                  <a:schemeClr val="tx1"/>
+                </a:solidFill>
+                <a:effectLst/>
+                <a:latin typeface="+mn-lt"/>
+                <a:ea typeface="+mn-ea"/>
+                <a:cs typeface="+mn-cs"/>
+              </a:rPr>
+              <a:t> </a:t>
+            </a:r>
+            <a:r>
+              <a:rPr lang="en-US" sz="1200" b="0" i="0" kern="1200" dirty="0" err="1">
+                <a:solidFill>
+                  <a:schemeClr val="tx1"/>
+                </a:solidFill>
+                <a:effectLst/>
+                <a:latin typeface="+mn-lt"/>
+                <a:ea typeface="+mn-ea"/>
+                <a:cs typeface="+mn-cs"/>
+              </a:rPr>
+              <a:t>mehr</a:t>
+            </a:r>
+            <a:r>
+              <a:rPr lang="en-US" sz="1200" b="0" i="0" kern="1200" dirty="0">
+                <a:solidFill>
+                  <a:schemeClr val="tx1"/>
+                </a:solidFill>
+                <a:effectLst/>
+                <a:latin typeface="+mn-lt"/>
+                <a:ea typeface="+mn-ea"/>
+                <a:cs typeface="+mn-cs"/>
+              </a:rPr>
+              <a:t> </a:t>
+            </a:r>
+            <a:r>
+              <a:rPr lang="en-US" sz="1200" b="0" i="0" kern="1200" dirty="0" err="1">
+                <a:solidFill>
+                  <a:schemeClr val="tx1"/>
+                </a:solidFill>
+                <a:effectLst/>
+                <a:latin typeface="+mn-lt"/>
+                <a:ea typeface="+mn-ea"/>
+                <a:cs typeface="+mn-cs"/>
+              </a:rPr>
+              <a:t>als</a:t>
+            </a:r>
+            <a:r>
+              <a:rPr lang="en-US" sz="1200" b="0" i="0" kern="1200" dirty="0">
+                <a:solidFill>
+                  <a:schemeClr val="tx1"/>
+                </a:solidFill>
+                <a:effectLst/>
+                <a:latin typeface="+mn-lt"/>
+                <a:ea typeface="+mn-ea"/>
+                <a:cs typeface="+mn-cs"/>
+              </a:rPr>
+              <a:t> </a:t>
+            </a:r>
+            <a:r>
+              <a:rPr lang="en-US" sz="1200" b="0" i="0" kern="1200" dirty="0" err="1">
+                <a:solidFill>
+                  <a:schemeClr val="tx1"/>
+                </a:solidFill>
+                <a:effectLst/>
+                <a:latin typeface="+mn-lt"/>
+                <a:ea typeface="+mn-ea"/>
+                <a:cs typeface="+mn-cs"/>
+              </a:rPr>
+              <a:t>tausend</a:t>
+            </a:r>
+            <a:r>
+              <a:rPr lang="en-US" sz="1200" b="0" i="0" kern="1200" dirty="0">
+                <a:solidFill>
+                  <a:schemeClr val="tx1"/>
+                </a:solidFill>
+                <a:effectLst/>
+                <a:latin typeface="+mn-lt"/>
+                <a:ea typeface="+mn-ea"/>
+                <a:cs typeface="+mn-cs"/>
+              </a:rPr>
+              <a:t> Zahlen. Wir </a:t>
+            </a:r>
+            <a:r>
+              <a:rPr lang="en-US" sz="1200" b="0" i="0" kern="1200" dirty="0" err="1">
+                <a:solidFill>
+                  <a:schemeClr val="tx1"/>
+                </a:solidFill>
+                <a:effectLst/>
+                <a:latin typeface="+mn-lt"/>
+                <a:ea typeface="+mn-ea"/>
+                <a:cs typeface="+mn-cs"/>
+              </a:rPr>
+              <a:t>erstellen</a:t>
+            </a:r>
+            <a:r>
+              <a:rPr lang="en-US" sz="1200" b="0" i="0" kern="1200" dirty="0">
+                <a:solidFill>
+                  <a:schemeClr val="tx1"/>
+                </a:solidFill>
+                <a:effectLst/>
+                <a:latin typeface="+mn-lt"/>
+                <a:ea typeface="+mn-ea"/>
+                <a:cs typeface="+mn-cs"/>
+              </a:rPr>
+              <a:t> </a:t>
+            </a:r>
+            <a:r>
+              <a:rPr lang="en-US" sz="1200" b="1" i="0" kern="1200" dirty="0" err="1">
+                <a:solidFill>
+                  <a:schemeClr val="tx1"/>
+                </a:solidFill>
+                <a:effectLst/>
+                <a:latin typeface="+mn-lt"/>
+                <a:ea typeface="+mn-ea"/>
+                <a:cs typeface="+mn-cs"/>
+              </a:rPr>
+              <a:t>Balkendiagramme</a:t>
+            </a:r>
+            <a:r>
+              <a:rPr lang="en-US" sz="1200" b="0" i="0" kern="1200" dirty="0">
+                <a:solidFill>
+                  <a:schemeClr val="tx1"/>
+                </a:solidFill>
+                <a:effectLst/>
+                <a:latin typeface="+mn-lt"/>
+                <a:ea typeface="+mn-ea"/>
+                <a:cs typeface="+mn-cs"/>
+              </a:rPr>
+              <a:t>, </a:t>
+            </a:r>
+            <a:r>
+              <a:rPr lang="en-US" sz="1200" b="1" i="0" kern="1200" dirty="0" err="1">
+                <a:solidFill>
+                  <a:schemeClr val="tx1"/>
+                </a:solidFill>
+                <a:effectLst/>
+                <a:latin typeface="+mn-lt"/>
+                <a:ea typeface="+mn-ea"/>
+                <a:cs typeface="+mn-cs"/>
+              </a:rPr>
+              <a:t>Histogramme</a:t>
+            </a:r>
+            <a:r>
+              <a:rPr lang="en-US" sz="1200" b="0" i="0" kern="1200" dirty="0">
+                <a:solidFill>
+                  <a:schemeClr val="tx1"/>
+                </a:solidFill>
+                <a:effectLst/>
+                <a:latin typeface="+mn-lt"/>
+                <a:ea typeface="+mn-ea"/>
+                <a:cs typeface="+mn-cs"/>
+              </a:rPr>
+              <a:t> und </a:t>
+            </a:r>
+            <a:r>
+              <a:rPr lang="en-US" sz="1200" b="1" i="0" kern="1200" dirty="0" err="1">
+                <a:solidFill>
+                  <a:schemeClr val="tx1"/>
+                </a:solidFill>
+                <a:effectLst/>
+                <a:latin typeface="+mn-lt"/>
+                <a:ea typeface="+mn-ea"/>
+                <a:cs typeface="+mn-cs"/>
+              </a:rPr>
+              <a:t>Streudiagramme</a:t>
+            </a:r>
+            <a:r>
+              <a:rPr lang="en-US" sz="1200" b="0" i="0" kern="1200" dirty="0">
+                <a:solidFill>
+                  <a:schemeClr val="tx1"/>
+                </a:solidFill>
+                <a:effectLst/>
+                <a:latin typeface="+mn-lt"/>
+                <a:ea typeface="+mn-ea"/>
+                <a:cs typeface="+mn-cs"/>
+              </a:rPr>
+              <a:t>."</a:t>
+            </a:r>
+          </a:p>
+          <a:p>
+            <a:pPr rtl="0"/>
+            <a:r>
+              <a:rPr lang="en-US" sz="1200" b="1" i="0" kern="1200" dirty="0">
+                <a:solidFill>
+                  <a:schemeClr val="tx1"/>
+                </a:solidFill>
+                <a:effectLst/>
+                <a:latin typeface="+mn-lt"/>
+                <a:ea typeface="+mn-ea"/>
+                <a:cs typeface="+mn-cs"/>
+              </a:rPr>
+              <a:t>Key words:</a:t>
+            </a:r>
+            <a:r>
+              <a:rPr lang="en-US" sz="1200" b="0" i="0" kern="1200" dirty="0">
+                <a:solidFill>
+                  <a:schemeClr val="tx1"/>
+                </a:solidFill>
+                <a:effectLst/>
+                <a:latin typeface="+mn-lt"/>
+                <a:ea typeface="+mn-ea"/>
+                <a:cs typeface="+mn-cs"/>
+              </a:rPr>
+              <a:t> </a:t>
+            </a:r>
+            <a:r>
+              <a:rPr lang="en-US" sz="1200" b="0" i="1" kern="1200" dirty="0" err="1">
+                <a:solidFill>
+                  <a:schemeClr val="tx1"/>
+                </a:solidFill>
+                <a:effectLst/>
+                <a:latin typeface="+mn-lt"/>
+                <a:ea typeface="+mn-ea"/>
+                <a:cs typeface="+mn-cs"/>
+              </a:rPr>
+              <a:t>Interaktive</a:t>
+            </a:r>
+            <a:r>
+              <a:rPr lang="en-US" sz="1200" b="0" i="1" kern="1200" dirty="0">
+                <a:solidFill>
+                  <a:schemeClr val="tx1"/>
+                </a:solidFill>
+                <a:effectLst/>
+                <a:latin typeface="+mn-lt"/>
+                <a:ea typeface="+mn-ea"/>
+                <a:cs typeface="+mn-cs"/>
+              </a:rPr>
+              <a:t> Charts</a:t>
+            </a:r>
+            <a:r>
+              <a:rPr lang="en-US" sz="1200" b="0" i="0" kern="1200" dirty="0">
+                <a:solidFill>
+                  <a:schemeClr val="tx1"/>
+                </a:solidFill>
+                <a:effectLst/>
+                <a:latin typeface="+mn-lt"/>
+                <a:ea typeface="+mn-ea"/>
+                <a:cs typeface="+mn-cs"/>
+              </a:rPr>
+              <a:t> (interactive charts).</a:t>
+            </a:r>
+          </a:p>
+          <a:p>
+            <a:pPr rtl="0"/>
+            <a:r>
+              <a:rPr lang="en-US" sz="1200" b="1" i="0" kern="1200" dirty="0">
+                <a:solidFill>
+                  <a:schemeClr val="tx1"/>
+                </a:solidFill>
+                <a:effectLst/>
+                <a:latin typeface="+mn-lt"/>
+                <a:ea typeface="+mn-ea"/>
+                <a:cs typeface="+mn-cs"/>
+              </a:rPr>
+              <a:t>8. Analytics-Workflow &amp; Integration</a:t>
+            </a:r>
+          </a:p>
+          <a:p>
+            <a:pPr rtl="0"/>
+            <a:r>
+              <a:rPr lang="en-US" sz="1200" b="0" i="0" kern="1200" dirty="0">
+                <a:solidFill>
+                  <a:schemeClr val="tx1"/>
+                </a:solidFill>
+                <a:effectLst/>
+                <a:latin typeface="+mn-lt"/>
+                <a:ea typeface="+mn-ea"/>
+                <a:cs typeface="+mn-cs"/>
+              </a:rPr>
+              <a:t>"Wir </a:t>
+            </a:r>
+            <a:r>
+              <a:rPr lang="en-US" sz="1200" b="0" i="0" kern="1200" dirty="0" err="1">
+                <a:solidFill>
+                  <a:schemeClr val="tx1"/>
+                </a:solidFill>
+                <a:effectLst/>
+                <a:latin typeface="+mn-lt"/>
+                <a:ea typeface="+mn-ea"/>
+                <a:cs typeface="+mn-cs"/>
+              </a:rPr>
+              <a:t>bringen</a:t>
+            </a:r>
+            <a:r>
+              <a:rPr lang="en-US" sz="1200" b="0" i="0" kern="1200" dirty="0">
+                <a:solidFill>
+                  <a:schemeClr val="tx1"/>
+                </a:solidFill>
+                <a:effectLst/>
+                <a:latin typeface="+mn-lt"/>
+                <a:ea typeface="+mn-ea"/>
+                <a:cs typeface="+mn-cs"/>
+              </a:rPr>
+              <a:t> </a:t>
+            </a:r>
+            <a:r>
+              <a:rPr lang="en-US" sz="1200" b="0" i="0" kern="1200" dirty="0" err="1">
+                <a:solidFill>
+                  <a:schemeClr val="tx1"/>
+                </a:solidFill>
+                <a:effectLst/>
+                <a:latin typeface="+mn-lt"/>
+                <a:ea typeface="+mn-ea"/>
+                <a:cs typeface="+mn-cs"/>
+              </a:rPr>
+              <a:t>alles</a:t>
+            </a:r>
+            <a:r>
+              <a:rPr lang="en-US" sz="1200" b="0" i="0" kern="1200" dirty="0">
+                <a:solidFill>
+                  <a:schemeClr val="tx1"/>
+                </a:solidFill>
+                <a:effectLst/>
+                <a:latin typeface="+mn-lt"/>
+                <a:ea typeface="+mn-ea"/>
+                <a:cs typeface="+mn-cs"/>
+              </a:rPr>
+              <a:t> </a:t>
+            </a:r>
+            <a:r>
+              <a:rPr lang="en-US" sz="1200" b="0" i="0" kern="1200" dirty="0" err="1">
+                <a:solidFill>
+                  <a:schemeClr val="tx1"/>
+                </a:solidFill>
+                <a:effectLst/>
+                <a:latin typeface="+mn-lt"/>
+                <a:ea typeface="+mn-ea"/>
+                <a:cs typeface="+mn-cs"/>
+              </a:rPr>
+              <a:t>zusammen</a:t>
+            </a:r>
+            <a:r>
+              <a:rPr lang="en-US" sz="1200" b="0" i="0" kern="1200" dirty="0">
+                <a:solidFill>
+                  <a:schemeClr val="tx1"/>
+                </a:solidFill>
+                <a:effectLst/>
+                <a:latin typeface="+mn-lt"/>
+                <a:ea typeface="+mn-ea"/>
+                <a:cs typeface="+mn-cs"/>
+              </a:rPr>
+              <a:t> in </a:t>
+            </a:r>
+            <a:r>
+              <a:rPr lang="en-US" sz="1200" b="0" i="0" kern="1200" dirty="0" err="1">
+                <a:solidFill>
+                  <a:schemeClr val="tx1"/>
+                </a:solidFill>
+                <a:effectLst/>
+                <a:latin typeface="+mn-lt"/>
+                <a:ea typeface="+mn-ea"/>
+                <a:cs typeface="+mn-cs"/>
+              </a:rPr>
+              <a:t>einen</a:t>
+            </a:r>
+            <a:r>
+              <a:rPr lang="en-US" sz="1200" b="0" i="0" kern="1200" dirty="0">
+                <a:solidFill>
+                  <a:schemeClr val="tx1"/>
+                </a:solidFill>
+                <a:effectLst/>
+                <a:latin typeface="+mn-lt"/>
+                <a:ea typeface="+mn-ea"/>
+                <a:cs typeface="+mn-cs"/>
+              </a:rPr>
+              <a:t> </a:t>
+            </a:r>
+            <a:r>
+              <a:rPr lang="en-US" sz="1200" b="0" i="0" kern="1200" dirty="0" err="1">
+                <a:solidFill>
+                  <a:schemeClr val="tx1"/>
+                </a:solidFill>
+                <a:effectLst/>
+                <a:latin typeface="+mn-lt"/>
+                <a:ea typeface="+mn-ea"/>
+                <a:cs typeface="+mn-cs"/>
+              </a:rPr>
+              <a:t>strukturierten</a:t>
+            </a:r>
+            <a:r>
+              <a:rPr lang="en-US" sz="1200" b="0" i="0" kern="1200" dirty="0">
+                <a:solidFill>
+                  <a:schemeClr val="tx1"/>
+                </a:solidFill>
+                <a:effectLst/>
+                <a:latin typeface="+mn-lt"/>
+                <a:ea typeface="+mn-ea"/>
+                <a:cs typeface="+mn-cs"/>
+              </a:rPr>
+              <a:t> </a:t>
+            </a:r>
+            <a:r>
+              <a:rPr lang="en-US" sz="1200" b="0" i="0" kern="1200" dirty="0" err="1">
+                <a:solidFill>
+                  <a:schemeClr val="tx1"/>
+                </a:solidFill>
+                <a:effectLst/>
+                <a:latin typeface="+mn-lt"/>
+                <a:ea typeface="+mn-ea"/>
+                <a:cs typeface="+mn-cs"/>
+              </a:rPr>
+              <a:t>Prozess</a:t>
+            </a:r>
+            <a:r>
+              <a:rPr lang="en-US" sz="1200" b="0" i="0" kern="1200" dirty="0">
+                <a:solidFill>
+                  <a:schemeClr val="tx1"/>
+                </a:solidFill>
+                <a:effectLst/>
+                <a:latin typeface="+mn-lt"/>
+                <a:ea typeface="+mn-ea"/>
+                <a:cs typeface="+mn-cs"/>
+              </a:rPr>
+              <a:t>. Wir </a:t>
+            </a:r>
+            <a:r>
+              <a:rPr lang="en-US" sz="1200" b="0" i="0" kern="1200" dirty="0" err="1">
+                <a:solidFill>
+                  <a:schemeClr val="tx1"/>
+                </a:solidFill>
+                <a:effectLst/>
+                <a:latin typeface="+mn-lt"/>
+                <a:ea typeface="+mn-ea"/>
+                <a:cs typeface="+mn-cs"/>
+              </a:rPr>
+              <a:t>üben</a:t>
+            </a:r>
+            <a:r>
+              <a:rPr lang="en-US" sz="1200" b="0" i="0" kern="1200" dirty="0">
+                <a:solidFill>
+                  <a:schemeClr val="tx1"/>
+                </a:solidFill>
+                <a:effectLst/>
+                <a:latin typeface="+mn-lt"/>
+                <a:ea typeface="+mn-ea"/>
+                <a:cs typeface="+mn-cs"/>
+              </a:rPr>
+              <a:t> das </a:t>
+            </a:r>
+            <a:r>
+              <a:rPr lang="en-US" sz="1200" b="0" i="0" kern="1200" dirty="0" err="1">
+                <a:solidFill>
+                  <a:schemeClr val="tx1"/>
+                </a:solidFill>
+                <a:effectLst/>
+                <a:latin typeface="+mn-lt"/>
+                <a:ea typeface="+mn-ea"/>
+                <a:cs typeface="+mn-cs"/>
+              </a:rPr>
+              <a:t>mit</a:t>
+            </a:r>
+            <a:r>
+              <a:rPr lang="en-US" sz="1200" b="0" i="0" kern="1200" dirty="0">
+                <a:solidFill>
+                  <a:schemeClr val="tx1"/>
+                </a:solidFill>
+                <a:effectLst/>
+                <a:latin typeface="+mn-lt"/>
+                <a:ea typeface="+mn-ea"/>
+                <a:cs typeface="+mn-cs"/>
+              </a:rPr>
+              <a:t> </a:t>
+            </a:r>
+            <a:r>
+              <a:rPr lang="en-US" sz="1200" b="0" i="0" kern="1200" dirty="0" err="1">
+                <a:solidFill>
+                  <a:schemeClr val="tx1"/>
+                </a:solidFill>
+                <a:effectLst/>
+                <a:latin typeface="+mn-lt"/>
+                <a:ea typeface="+mn-ea"/>
+                <a:cs typeface="+mn-cs"/>
+              </a:rPr>
+              <a:t>kleinen</a:t>
+            </a:r>
+            <a:r>
+              <a:rPr lang="en-US" sz="1200" b="0" i="0" kern="1200" dirty="0">
+                <a:solidFill>
+                  <a:schemeClr val="tx1"/>
+                </a:solidFill>
+                <a:effectLst/>
+                <a:latin typeface="+mn-lt"/>
+                <a:ea typeface="+mn-ea"/>
+                <a:cs typeface="+mn-cs"/>
+              </a:rPr>
+              <a:t> </a:t>
+            </a:r>
+            <a:r>
+              <a:rPr lang="en-US" sz="1200" b="1" i="0" kern="1200" dirty="0" err="1">
+                <a:solidFill>
+                  <a:schemeClr val="tx1"/>
+                </a:solidFill>
+                <a:effectLst/>
+                <a:latin typeface="+mn-lt"/>
+                <a:ea typeface="+mn-ea"/>
+                <a:cs typeface="+mn-cs"/>
+              </a:rPr>
+              <a:t>Fallbeispielen</a:t>
+            </a:r>
+            <a:r>
+              <a:rPr lang="en-US" sz="1200" b="0" i="0" kern="1200" dirty="0">
+                <a:solidFill>
+                  <a:schemeClr val="tx1"/>
+                </a:solidFill>
+                <a:effectLst/>
+                <a:latin typeface="+mn-lt"/>
+                <a:ea typeface="+mn-ea"/>
+                <a:cs typeface="+mn-cs"/>
+              </a:rPr>
+              <a:t>."</a:t>
+            </a:r>
+          </a:p>
+          <a:p>
+            <a:pPr rtl="0"/>
+            <a:r>
+              <a:rPr lang="en-US" sz="1200" b="1" i="0" kern="1200" dirty="0">
+                <a:solidFill>
+                  <a:schemeClr val="tx1"/>
+                </a:solidFill>
+                <a:effectLst/>
+                <a:latin typeface="+mn-lt"/>
+                <a:ea typeface="+mn-ea"/>
+                <a:cs typeface="+mn-cs"/>
+              </a:rPr>
+              <a:t>Key words:</a:t>
+            </a:r>
+            <a:r>
+              <a:rPr lang="en-US" sz="1200" b="0" i="0" kern="1200" dirty="0">
+                <a:solidFill>
+                  <a:schemeClr val="tx1"/>
+                </a:solidFill>
+                <a:effectLst/>
+                <a:latin typeface="+mn-lt"/>
+                <a:ea typeface="+mn-ea"/>
+                <a:cs typeface="+mn-cs"/>
+              </a:rPr>
+              <a:t> </a:t>
+            </a:r>
+            <a:r>
+              <a:rPr lang="en-US" sz="1200" b="0" i="1" kern="1200" dirty="0" err="1">
+                <a:solidFill>
+                  <a:schemeClr val="tx1"/>
+                </a:solidFill>
+                <a:effectLst/>
+                <a:latin typeface="+mn-lt"/>
+                <a:ea typeface="+mn-ea"/>
+                <a:cs typeface="+mn-cs"/>
+              </a:rPr>
+              <a:t>Fallbeispiele</a:t>
+            </a:r>
+            <a:r>
+              <a:rPr lang="en-US" sz="1200" b="0" i="0" kern="1200" dirty="0">
+                <a:solidFill>
+                  <a:schemeClr val="tx1"/>
+                </a:solidFill>
+                <a:effectLst/>
+                <a:latin typeface="+mn-lt"/>
+                <a:ea typeface="+mn-ea"/>
+                <a:cs typeface="+mn-cs"/>
+              </a:rPr>
+              <a:t> (case studies), </a:t>
+            </a:r>
+            <a:r>
+              <a:rPr lang="en-US" sz="1200" b="0" i="1" kern="1200" dirty="0" err="1">
+                <a:solidFill>
+                  <a:schemeClr val="tx1"/>
+                </a:solidFill>
+                <a:effectLst/>
+                <a:latin typeface="+mn-lt"/>
+                <a:ea typeface="+mn-ea"/>
+                <a:cs typeface="+mn-cs"/>
+              </a:rPr>
+              <a:t>vorherige</a:t>
+            </a:r>
+            <a:r>
+              <a:rPr lang="en-US" sz="1200" b="0" i="1" kern="1200" dirty="0">
+                <a:solidFill>
+                  <a:schemeClr val="tx1"/>
+                </a:solidFill>
+                <a:effectLst/>
+                <a:latin typeface="+mn-lt"/>
+                <a:ea typeface="+mn-ea"/>
+                <a:cs typeface="+mn-cs"/>
+              </a:rPr>
+              <a:t> </a:t>
+            </a:r>
+            <a:r>
+              <a:rPr lang="en-US" sz="1200" b="0" i="1" kern="1200" dirty="0" err="1">
+                <a:solidFill>
+                  <a:schemeClr val="tx1"/>
+                </a:solidFill>
+                <a:effectLst/>
+                <a:latin typeface="+mn-lt"/>
+                <a:ea typeface="+mn-ea"/>
+                <a:cs typeface="+mn-cs"/>
+              </a:rPr>
+              <a:t>Schritte</a:t>
+            </a:r>
+            <a:r>
+              <a:rPr lang="en-US" sz="1200" b="0" i="0" kern="1200" dirty="0">
+                <a:solidFill>
+                  <a:schemeClr val="tx1"/>
+                </a:solidFill>
+                <a:effectLst/>
+                <a:latin typeface="+mn-lt"/>
+                <a:ea typeface="+mn-ea"/>
+                <a:cs typeface="+mn-cs"/>
+              </a:rPr>
+              <a:t> (previous steps).</a:t>
+            </a:r>
+          </a:p>
+          <a:p>
+            <a:pPr rtl="0"/>
+            <a:r>
+              <a:rPr lang="en-US" sz="1200" b="1" i="0" kern="1200" dirty="0">
+                <a:solidFill>
+                  <a:schemeClr val="tx1"/>
+                </a:solidFill>
+                <a:effectLst/>
+                <a:latin typeface="+mn-lt"/>
+                <a:ea typeface="+mn-ea"/>
+                <a:cs typeface="+mn-cs"/>
+              </a:rPr>
+              <a:t>9. Capstone End-to-End Projekt</a:t>
+            </a:r>
+          </a:p>
+          <a:p>
+            <a:pPr rtl="0"/>
+            <a:r>
+              <a:rPr lang="en-US" sz="1200" b="0" i="0" kern="1200" dirty="0">
+                <a:solidFill>
+                  <a:schemeClr val="tx1"/>
+                </a:solidFill>
+                <a:effectLst/>
+                <a:latin typeface="+mn-lt"/>
+                <a:ea typeface="+mn-ea"/>
+                <a:cs typeface="+mn-cs"/>
+              </a:rPr>
+              <a:t>"Am Ende </a:t>
+            </a:r>
+            <a:r>
+              <a:rPr lang="en-US" sz="1200" b="0" i="0" kern="1200" dirty="0" err="1">
+                <a:solidFill>
+                  <a:schemeClr val="tx1"/>
+                </a:solidFill>
+                <a:effectLst/>
+                <a:latin typeface="+mn-lt"/>
+                <a:ea typeface="+mn-ea"/>
+                <a:cs typeface="+mn-cs"/>
+              </a:rPr>
+              <a:t>wenden</a:t>
+            </a:r>
+            <a:r>
+              <a:rPr lang="en-US" sz="1200" b="0" i="0" kern="1200" dirty="0">
+                <a:solidFill>
+                  <a:schemeClr val="tx1"/>
+                </a:solidFill>
+                <a:effectLst/>
+                <a:latin typeface="+mn-lt"/>
+                <a:ea typeface="+mn-ea"/>
+                <a:cs typeface="+mn-cs"/>
+              </a:rPr>
+              <a:t> Sie </a:t>
+            </a:r>
+            <a:r>
+              <a:rPr lang="en-US" sz="1200" b="0" i="0" kern="1200" dirty="0" err="1">
+                <a:solidFill>
+                  <a:schemeClr val="tx1"/>
+                </a:solidFill>
+                <a:effectLst/>
+                <a:latin typeface="+mn-lt"/>
+                <a:ea typeface="+mn-ea"/>
+                <a:cs typeface="+mn-cs"/>
+              </a:rPr>
+              <a:t>alles</a:t>
+            </a:r>
+            <a:r>
+              <a:rPr lang="en-US" sz="1200" b="0" i="0" kern="1200" dirty="0">
+                <a:solidFill>
+                  <a:schemeClr val="tx1"/>
+                </a:solidFill>
+                <a:effectLst/>
+                <a:latin typeface="+mn-lt"/>
+                <a:ea typeface="+mn-ea"/>
+                <a:cs typeface="+mn-cs"/>
+              </a:rPr>
+              <a:t> an. Von der </a:t>
+            </a:r>
+            <a:r>
+              <a:rPr lang="en-US" sz="1200" b="0" i="0" kern="1200" dirty="0" err="1">
+                <a:solidFill>
+                  <a:schemeClr val="tx1"/>
+                </a:solidFill>
+                <a:effectLst/>
+                <a:latin typeface="+mn-lt"/>
+                <a:ea typeface="+mn-ea"/>
+                <a:cs typeface="+mn-cs"/>
+              </a:rPr>
+              <a:t>ersten</a:t>
+            </a:r>
+            <a:r>
+              <a:rPr lang="en-US" sz="1200" b="0" i="0" kern="1200" dirty="0">
+                <a:solidFill>
+                  <a:schemeClr val="tx1"/>
+                </a:solidFill>
+                <a:effectLst/>
+                <a:latin typeface="+mn-lt"/>
+                <a:ea typeface="+mn-ea"/>
+                <a:cs typeface="+mn-cs"/>
+              </a:rPr>
+              <a:t> </a:t>
+            </a:r>
+            <a:r>
+              <a:rPr lang="en-US" sz="1200" b="0" i="0" kern="1200" dirty="0" err="1">
+                <a:solidFill>
+                  <a:schemeClr val="tx1"/>
+                </a:solidFill>
+                <a:effectLst/>
+                <a:latin typeface="+mn-lt"/>
+                <a:ea typeface="+mn-ea"/>
+                <a:cs typeface="+mn-cs"/>
+              </a:rPr>
+              <a:t>Fragestellung</a:t>
+            </a:r>
+            <a:r>
+              <a:rPr lang="en-US" sz="1200" b="0" i="0" kern="1200" dirty="0">
+                <a:solidFill>
+                  <a:schemeClr val="tx1"/>
+                </a:solidFill>
+                <a:effectLst/>
+                <a:latin typeface="+mn-lt"/>
+                <a:ea typeface="+mn-ea"/>
+                <a:cs typeface="+mn-cs"/>
+              </a:rPr>
+              <a:t> bis </a:t>
+            </a:r>
+            <a:r>
+              <a:rPr lang="en-US" sz="1200" b="0" i="0" kern="1200" dirty="0" err="1">
+                <a:solidFill>
+                  <a:schemeClr val="tx1"/>
+                </a:solidFill>
+                <a:effectLst/>
+                <a:latin typeface="+mn-lt"/>
+                <a:ea typeface="+mn-ea"/>
+                <a:cs typeface="+mn-cs"/>
+              </a:rPr>
+              <a:t>zur</a:t>
+            </a:r>
+            <a:r>
+              <a:rPr lang="en-US" sz="1200" b="0" i="0" kern="1200" dirty="0">
+                <a:solidFill>
+                  <a:schemeClr val="tx1"/>
+                </a:solidFill>
+                <a:effectLst/>
+                <a:latin typeface="+mn-lt"/>
+                <a:ea typeface="+mn-ea"/>
+                <a:cs typeface="+mn-cs"/>
+              </a:rPr>
+              <a:t> </a:t>
+            </a:r>
+            <a:r>
+              <a:rPr lang="en-US" sz="1200" b="0" i="0" kern="1200" dirty="0" err="1">
+                <a:solidFill>
+                  <a:schemeClr val="tx1"/>
+                </a:solidFill>
+                <a:effectLst/>
+                <a:latin typeface="+mn-lt"/>
+                <a:ea typeface="+mn-ea"/>
+                <a:cs typeface="+mn-cs"/>
+              </a:rPr>
+              <a:t>finalen</a:t>
+            </a:r>
+            <a:r>
+              <a:rPr lang="en-US" sz="1200" b="0" i="0" kern="1200" dirty="0">
+                <a:solidFill>
+                  <a:schemeClr val="tx1"/>
+                </a:solidFill>
+                <a:effectLst/>
+                <a:latin typeface="+mn-lt"/>
+                <a:ea typeface="+mn-ea"/>
+                <a:cs typeface="+mn-cs"/>
+              </a:rPr>
+              <a:t> </a:t>
+            </a:r>
+            <a:r>
+              <a:rPr lang="en-US" sz="1200" b="0" i="0" kern="1200" dirty="0" err="1">
+                <a:solidFill>
+                  <a:schemeClr val="tx1"/>
+                </a:solidFill>
+                <a:effectLst/>
+                <a:latin typeface="+mn-lt"/>
+                <a:ea typeface="+mn-ea"/>
+                <a:cs typeface="+mn-cs"/>
+              </a:rPr>
+              <a:t>Präsentation</a:t>
+            </a:r>
+            <a:r>
+              <a:rPr lang="en-US" sz="1200" b="0" i="0" kern="1200" dirty="0">
+                <a:solidFill>
+                  <a:schemeClr val="tx1"/>
+                </a:solidFill>
+                <a:effectLst/>
+                <a:latin typeface="+mn-lt"/>
+                <a:ea typeface="+mn-ea"/>
+                <a:cs typeface="+mn-cs"/>
+              </a:rPr>
+              <a:t> </a:t>
+            </a:r>
+            <a:r>
+              <a:rPr lang="en-US" sz="1200" b="0" i="0" kern="1200" dirty="0" err="1">
+                <a:solidFill>
+                  <a:schemeClr val="tx1"/>
+                </a:solidFill>
+                <a:effectLst/>
+                <a:latin typeface="+mn-lt"/>
+                <a:ea typeface="+mn-ea"/>
+                <a:cs typeface="+mn-cs"/>
+              </a:rPr>
+              <a:t>Ihrer</a:t>
+            </a:r>
+            <a:r>
+              <a:rPr lang="en-US" sz="1200" b="0" i="0" kern="1200" dirty="0">
+                <a:solidFill>
+                  <a:schemeClr val="tx1"/>
+                </a:solidFill>
+                <a:effectLst/>
+                <a:latin typeface="+mn-lt"/>
+                <a:ea typeface="+mn-ea"/>
+                <a:cs typeface="+mn-cs"/>
+              </a:rPr>
+              <a:t> </a:t>
+            </a:r>
+            <a:r>
+              <a:rPr lang="en-US" sz="1200" b="0" i="0" kern="1200" dirty="0" err="1">
+                <a:solidFill>
+                  <a:schemeClr val="tx1"/>
+                </a:solidFill>
+                <a:effectLst/>
+                <a:latin typeface="+mn-lt"/>
+                <a:ea typeface="+mn-ea"/>
+                <a:cs typeface="+mn-cs"/>
+              </a:rPr>
+              <a:t>Ergebnisse</a:t>
+            </a:r>
+            <a:r>
+              <a:rPr lang="en-US" sz="1200" b="0" i="0" kern="1200" dirty="0">
+                <a:solidFill>
+                  <a:schemeClr val="tx1"/>
+                </a:solidFill>
+                <a:effectLst/>
+                <a:latin typeface="+mn-lt"/>
+                <a:ea typeface="+mn-ea"/>
+                <a:cs typeface="+mn-cs"/>
+              </a:rPr>
+              <a:t>."</a:t>
+            </a:r>
+          </a:p>
+          <a:p>
+            <a:pPr rtl="0"/>
+            <a:r>
+              <a:rPr lang="en-US" sz="1200" b="1" i="0" kern="1200" dirty="0">
+                <a:solidFill>
+                  <a:schemeClr val="tx1"/>
+                </a:solidFill>
+                <a:effectLst/>
+                <a:latin typeface="+mn-lt"/>
+                <a:ea typeface="+mn-ea"/>
+                <a:cs typeface="+mn-cs"/>
+              </a:rPr>
+              <a:t>Key words:</a:t>
+            </a:r>
+            <a:r>
+              <a:rPr lang="en-US" sz="1200" b="0" i="0" kern="1200" dirty="0">
+                <a:solidFill>
+                  <a:schemeClr val="tx1"/>
+                </a:solidFill>
+                <a:effectLst/>
+                <a:latin typeface="+mn-lt"/>
+                <a:ea typeface="+mn-ea"/>
+                <a:cs typeface="+mn-cs"/>
+              </a:rPr>
+              <a:t> </a:t>
+            </a:r>
+            <a:r>
+              <a:rPr lang="en-US" sz="1200" b="0" i="1" kern="1200" dirty="0" err="1">
+                <a:solidFill>
+                  <a:schemeClr val="tx1"/>
+                </a:solidFill>
+                <a:effectLst/>
+                <a:latin typeface="+mn-lt"/>
+                <a:ea typeface="+mn-ea"/>
+                <a:cs typeface="+mn-cs"/>
+              </a:rPr>
+              <a:t>Ergebnisse</a:t>
+            </a:r>
+            <a:r>
+              <a:rPr lang="en-US" sz="1200" b="0" i="1" kern="1200" dirty="0">
+                <a:solidFill>
+                  <a:schemeClr val="tx1"/>
+                </a:solidFill>
+                <a:effectLst/>
+                <a:latin typeface="+mn-lt"/>
+                <a:ea typeface="+mn-ea"/>
+                <a:cs typeface="+mn-cs"/>
+              </a:rPr>
+              <a:t> </a:t>
+            </a:r>
+            <a:r>
+              <a:rPr lang="en-US" sz="1200" b="0" i="1" kern="1200" dirty="0" err="1">
+                <a:solidFill>
+                  <a:schemeClr val="tx1"/>
+                </a:solidFill>
+                <a:effectLst/>
+                <a:latin typeface="+mn-lt"/>
+                <a:ea typeface="+mn-ea"/>
+                <a:cs typeface="+mn-cs"/>
+              </a:rPr>
+              <a:t>diskutieren</a:t>
+            </a:r>
+            <a:r>
+              <a:rPr lang="en-US" sz="1200" b="0" i="0" kern="1200" dirty="0">
+                <a:solidFill>
+                  <a:schemeClr val="tx1"/>
+                </a:solidFill>
+                <a:effectLst/>
+                <a:latin typeface="+mn-lt"/>
+                <a:ea typeface="+mn-ea"/>
+                <a:cs typeface="+mn-cs"/>
+              </a:rPr>
+              <a:t> (discuss results), </a:t>
+            </a:r>
+            <a:r>
+              <a:rPr lang="en-US" sz="1200" b="0" i="1" kern="1200" dirty="0" err="1">
+                <a:solidFill>
+                  <a:schemeClr val="tx1"/>
+                </a:solidFill>
+                <a:effectLst/>
+                <a:latin typeface="+mn-lt"/>
+                <a:ea typeface="+mn-ea"/>
+                <a:cs typeface="+mn-cs"/>
+              </a:rPr>
+              <a:t>anwenden</a:t>
+            </a:r>
+            <a:r>
+              <a:rPr lang="en-US" sz="1200" b="0" i="0" kern="1200" dirty="0">
+                <a:solidFill>
+                  <a:schemeClr val="tx1"/>
+                </a:solidFill>
+                <a:effectLst/>
+                <a:latin typeface="+mn-lt"/>
+                <a:ea typeface="+mn-ea"/>
+                <a:cs typeface="+mn-cs"/>
+              </a:rPr>
+              <a:t> (to apply).</a:t>
+            </a:r>
+          </a:p>
+          <a:p>
+            <a:endParaRPr lang="en-US" b="1" dirty="0"/>
+          </a:p>
+          <a:p>
+            <a:r>
+              <a:rPr lang="en-US" b="1" dirty="0"/>
+              <a:t>Setup, Data &amp; Data Types</a:t>
+            </a:r>
+            <a:endParaRPr lang="en-US" dirty="0"/>
+          </a:p>
+          <a:p>
+            <a:r>
+              <a:rPr lang="en-US" dirty="0"/>
+              <a:t>Install Python, Notebooks, Libraries</a:t>
+            </a:r>
+          </a:p>
+          <a:p>
+            <a:r>
+              <a:rPr lang="en-US" dirty="0"/>
+              <a:t>Overview of Data Types</a:t>
+            </a:r>
+          </a:p>
+          <a:p>
+            <a:r>
+              <a:rPr lang="en-US" dirty="0"/>
+              <a:t>Data | Information</a:t>
+            </a:r>
+          </a:p>
+          <a:p>
+            <a:r>
+              <a:rPr lang="en-US" b="1" dirty="0"/>
+              <a:t>Define Analysis Goals &amp; KPIs</a:t>
+            </a:r>
+            <a:endParaRPr lang="en-US" dirty="0"/>
+          </a:p>
+          <a:p>
+            <a:r>
+              <a:rPr lang="en-US" dirty="0"/>
+              <a:t>Identify analysis questions &amp; objectives</a:t>
+            </a:r>
+          </a:p>
+          <a:p>
+            <a:r>
+              <a:rPr lang="en-US" dirty="0"/>
+              <a:t>Link KPIs to business decisions</a:t>
+            </a:r>
+          </a:p>
+          <a:p>
+            <a:r>
+              <a:rPr lang="en-US" b="1" dirty="0"/>
+              <a:t>Data Gathering &amp; Quality</a:t>
+            </a:r>
+            <a:endParaRPr lang="en-US" dirty="0"/>
+          </a:p>
+          <a:p>
+            <a:r>
+              <a:rPr lang="en-US" dirty="0"/>
+              <a:t>Collect data: APIs, local files, unstructured data</a:t>
+            </a:r>
+          </a:p>
+          <a:p>
+            <a:r>
+              <a:rPr lang="en-US" dirty="0"/>
+              <a:t>Check completeness, accuracy, consistency</a:t>
+            </a:r>
+          </a:p>
+          <a:p>
+            <a:r>
+              <a:rPr lang="en-US" dirty="0"/>
+              <a:t>Load &amp; inspect datasets</a:t>
+            </a:r>
+          </a:p>
+          <a:p>
+            <a:r>
+              <a:rPr lang="en-US" dirty="0"/>
+              <a:t>Check for missing values, duplicates, formatting</a:t>
+            </a:r>
+          </a:p>
+          <a:p>
+            <a:r>
+              <a:rPr lang="en-US" b="1" dirty="0"/>
+              <a:t>Data Cleaning &amp; Preparation</a:t>
+            </a:r>
+            <a:endParaRPr lang="en-US" dirty="0"/>
+          </a:p>
+          <a:p>
+            <a:r>
+              <a:rPr lang="en-US" dirty="0"/>
+              <a:t>Correct missing / incorrect values</a:t>
+            </a:r>
+          </a:p>
+          <a:p>
+            <a:r>
+              <a:rPr lang="en-US" dirty="0"/>
+              <a:t>Standardize formats</a:t>
+            </a:r>
+          </a:p>
+          <a:p>
+            <a:r>
+              <a:rPr lang="en-US" dirty="0"/>
+              <a:t>Transform variables for analysis</a:t>
+            </a:r>
+          </a:p>
+          <a:p>
+            <a:r>
+              <a:rPr lang="en-US" b="1" dirty="0"/>
+              <a:t>Data Modeling &amp; Aggregation</a:t>
+            </a:r>
+            <a:endParaRPr lang="en-US" dirty="0"/>
+          </a:p>
+          <a:p>
+            <a:r>
+              <a:rPr lang="en-US" dirty="0"/>
+              <a:t>Organize data into tables &amp; relationships</a:t>
+            </a:r>
+          </a:p>
+          <a:p>
+            <a:r>
+              <a:rPr lang="en-US" dirty="0"/>
+              <a:t>Feature engineering &amp; aggregations</a:t>
+            </a:r>
+          </a:p>
+          <a:p>
+            <a:r>
+              <a:rPr lang="en-US" b="1" dirty="0"/>
+              <a:t>Descriptive Statistics &amp; KPIs</a:t>
+            </a:r>
+            <a:endParaRPr lang="en-US" dirty="0"/>
+          </a:p>
+          <a:p>
+            <a:r>
+              <a:rPr lang="en-US" dirty="0"/>
+              <a:t>Mean, Median, Mode, Standard Deviation, Range</a:t>
+            </a:r>
+          </a:p>
+          <a:p>
+            <a:r>
+              <a:rPr lang="en-US" dirty="0"/>
+              <a:t>Correlations &amp; Cross-tabs</a:t>
+            </a:r>
+          </a:p>
+          <a:p>
+            <a:r>
+              <a:rPr lang="en-US" b="1" dirty="0"/>
+              <a:t>Data Visualization</a:t>
+            </a:r>
+            <a:endParaRPr lang="en-US" dirty="0"/>
+          </a:p>
+          <a:p>
+            <a:r>
+              <a:rPr lang="en-US" dirty="0"/>
+              <a:t>Classic charts: Bar chart, Histogram, Boxplot, Line chart, Scatter plot</a:t>
+            </a:r>
+          </a:p>
+          <a:p>
+            <a:r>
+              <a:rPr lang="en-US" dirty="0"/>
+              <a:t>Interactive charts</a:t>
+            </a:r>
+          </a:p>
+          <a:p>
+            <a:r>
+              <a:rPr lang="en-US" b="1" dirty="0"/>
+              <a:t>Analytics Workflow &amp; Integration</a:t>
+            </a:r>
+            <a:endParaRPr lang="en-US" dirty="0"/>
+          </a:p>
+          <a:p>
+            <a:r>
+              <a:rPr lang="en-US" dirty="0"/>
+              <a:t>Structured workflow</a:t>
+            </a:r>
+          </a:p>
+          <a:p>
+            <a:r>
+              <a:rPr lang="en-US" dirty="0"/>
+              <a:t>Mini case studies using all previous steps</a:t>
+            </a:r>
+          </a:p>
+          <a:p>
+            <a:r>
+              <a:rPr lang="en-US" b="1" dirty="0"/>
+              <a:t>Capstone End-to-End Project</a:t>
+            </a:r>
+            <a:endParaRPr lang="en-US" dirty="0"/>
+          </a:p>
+          <a:p>
+            <a:r>
+              <a:rPr lang="en-US" dirty="0"/>
+              <a:t>Complete analysis from question to presentation</a:t>
+            </a:r>
+          </a:p>
+          <a:p>
+            <a:r>
+              <a:rPr lang="en-US" dirty="0"/>
+              <a:t>Apply all learned steps</a:t>
+            </a:r>
+          </a:p>
+          <a:p>
+            <a:r>
+              <a:rPr lang="en-US" dirty="0"/>
+              <a:t>Present &amp; discuss results</a:t>
+            </a:r>
+          </a:p>
+        </p:txBody>
+      </p:sp>
+      <p:sp>
+        <p:nvSpPr>
+          <p:cNvPr id="4" name="Slide Number Placeholder 3"/>
+          <p:cNvSpPr>
+            <a:spLocks noGrp="1"/>
+          </p:cNvSpPr>
+          <p:nvPr>
+            <p:ph type="sldNum" sz="quarter" idx="5"/>
+          </p:nvPr>
+        </p:nvSpPr>
+        <p:spPr/>
+        <p:txBody>
+          <a:bodyPr/>
+          <a:lstStyle/>
+          <a:p>
+            <a:fld id="{60C2D7CD-EEF3-4145-A484-A9D67FF727B1}" type="slidenum">
+              <a:rPr lang="LID4096" smtClean="0"/>
+              <a:t>4</a:t>
             </a:fld>
             <a:endParaRPr lang="LID4096"/>
           </a:p>
@@ -4317,6 +8768,137 @@
   <p:cSld>
     <p:spTree>
       <p:nvGrpSpPr>
+        <p:cNvPr id="1" name="">
+          <a:extLst>
+            <a:ext uri="{FF2B5EF4-FFF2-40B4-BE49-F238E27FC236}">
+              <a16:creationId xmlns:a16="http://schemas.microsoft.com/office/drawing/2014/main" id="{8A4C98E5-5A49-760C-EC35-E81E4300AD3D}"/>
+            </a:ext>
+          </a:extLst>
+        </p:cNvPr>
+        <p:cNvGrpSpPr/>
+        <p:nvPr/>
+      </p:nvGrpSpPr>
+      <p:grpSpPr>
+        <a:xfrm>
+          <a:off x="0" y="0"/>
+          <a:ext cx="0" cy="0"/>
+          <a:chOff x="0" y="0"/>
+          <a:chExt cx="0" cy="0"/>
+        </a:xfrm>
+      </p:grpSpPr>
+      <p:sp>
+        <p:nvSpPr>
+          <p:cNvPr id="2" name="Title 1">
+            <a:extLst>
+              <a:ext uri="{FF2B5EF4-FFF2-40B4-BE49-F238E27FC236}">
+                <a16:creationId xmlns:a16="http://schemas.microsoft.com/office/drawing/2014/main" id="{56177685-C07F-EFB7-72F1-1422DCA0C095}"/>
+              </a:ext>
+            </a:extLst>
+          </p:cNvPr>
+          <p:cNvSpPr>
+            <a:spLocks noGrp="1"/>
+          </p:cNvSpPr>
+          <p:nvPr>
+            <p:ph type="ctrTitle"/>
+          </p:nvPr>
+        </p:nvSpPr>
+        <p:spPr/>
+        <p:txBody>
+          <a:bodyPr>
+            <a:normAutofit/>
+          </a:bodyPr>
+          <a:lstStyle/>
+          <a:p>
+            <a:r>
+              <a:rPr lang="en-US" sz="8000" b="1" dirty="0" err="1">
+                <a:solidFill>
+                  <a:schemeClr val="accent1">
+                    <a:lumMod val="75000"/>
+                  </a:schemeClr>
+                </a:solidFill>
+              </a:rPr>
+              <a:t>Datenanalyse</a:t>
+            </a:r>
+            <a:br>
+              <a:rPr lang="en-US" sz="8000" b="1" dirty="0">
+                <a:solidFill>
+                  <a:schemeClr val="accent1">
+                    <a:lumMod val="75000"/>
+                  </a:schemeClr>
+                </a:solidFill>
+              </a:rPr>
+            </a:br>
+            <a:r>
+              <a:rPr lang="en-US" sz="2400" b="1" dirty="0"/>
+              <a:t>Data Analysis</a:t>
+            </a:r>
+            <a:endParaRPr lang="LID4096" sz="8000" b="1" dirty="0">
+              <a:solidFill>
+                <a:schemeClr val="accent1">
+                  <a:lumMod val="75000"/>
+                </a:schemeClr>
+              </a:solidFill>
+            </a:endParaRPr>
+          </a:p>
+        </p:txBody>
+      </p:sp>
+      <p:sp>
+        <p:nvSpPr>
+          <p:cNvPr id="3" name="Subtitle 2">
+            <a:extLst>
+              <a:ext uri="{FF2B5EF4-FFF2-40B4-BE49-F238E27FC236}">
+                <a16:creationId xmlns:a16="http://schemas.microsoft.com/office/drawing/2014/main" id="{3498E596-E0F4-E60F-E73A-05489C07A5DA}"/>
+              </a:ext>
+            </a:extLst>
+          </p:cNvPr>
+          <p:cNvSpPr>
+            <a:spLocks noGrp="1"/>
+          </p:cNvSpPr>
+          <p:nvPr>
+            <p:ph type="subTitle" idx="1"/>
+          </p:nvPr>
+        </p:nvSpPr>
+        <p:spPr>
+          <a:xfrm>
+            <a:off x="1524000" y="3602038"/>
+            <a:ext cx="9144000" cy="989213"/>
+          </a:xfrm>
+        </p:spPr>
+        <p:txBody>
+          <a:bodyPr>
+            <a:normAutofit fontScale="47500" lnSpcReduction="20000"/>
+          </a:bodyPr>
+          <a:lstStyle/>
+          <a:p>
+            <a:br>
+              <a:rPr lang="en-US" sz="3600" b="1" dirty="0"/>
+            </a:br>
+            <a:r>
+              <a:rPr lang="en-US" sz="12600" b="1" dirty="0" err="1"/>
+              <a:t>Grundlagen</a:t>
+            </a:r>
+            <a:endParaRPr lang="LID4096" sz="3600" b="1" dirty="0"/>
+          </a:p>
+        </p:txBody>
+      </p:sp>
+    </p:spTree>
+    <p:extLst>
+      <p:ext uri="{BB962C8B-B14F-4D97-AF65-F5344CB8AC3E}">
+        <p14:creationId xmlns:p14="http://schemas.microsoft.com/office/powerpoint/2010/main" val="2112175412"/>
+      </p:ext>
+    </p:extLst>
+  </p:cSld>
+  <p:clrMapOvr>
+    <a:masterClrMapping/>
+  </p:clrMapOvr>
+</p:sld>
+</file>
+
+<file path=ppt/slides/slide3.xml><?xml version="1.0" encoding="utf-8"?>
+<p:sld xmlns:a="http://schemas.openxmlformats.org/drawingml/2006/main" xmlns:r="http://schemas.openxmlformats.org/officeDocument/2006/relationships" xmlns:p="http://schemas.openxmlformats.org/presentationml/2006/main">
+  <p:cSld>
+    <p:spTree>
+      <p:nvGrpSpPr>
         <p:cNvPr id="1" name=""/>
         <p:cNvGrpSpPr/>
         <p:nvPr/>
@@ -5295,7 +9877,7 @@
 </p:sld>
 </file>
 
-<file path=ppt/slides/slide3.xml><?xml version="1.0" encoding="utf-8"?>
+<file path=ppt/slides/slide4.xml><?xml version="1.0" encoding="utf-8"?>
 <p:sld xmlns:a="http://schemas.openxmlformats.org/drawingml/2006/main" xmlns:r="http://schemas.openxmlformats.org/officeDocument/2006/relationships" xmlns:p="http://schemas.openxmlformats.org/presentationml/2006/main">
   <p:cSld>
     <p:spTree>
@@ -5425,13 +10007,8 @@
             </a:pPr>
             <a:r>
               <a:rPr lang="de-DE" sz="1400" dirty="0"/>
-              <a:t>Data | Information </a:t>
-            </a:r>
-            <a:r>
-              <a:rPr lang="de-DE" sz="1400"/>
-              <a:t>| Dataset</a:t>
-            </a:r>
-            <a:endParaRPr lang="de-DE" sz="1400" dirty="0"/>
+              <a:t>Data | Information | Dataset</a:t>
+            </a:r>
           </a:p>
           <a:p>
             <a:pPr>
